--- a/Crop for Trust 프로젝트 이미지/Crop_for_Trust_Figures.pptx
+++ b/Crop for Trust 프로젝트 이미지/Crop_for_Trust_Figures.pptx
@@ -5,7 +5,7 @@
     <p:sldMasterId id="2147483684" r:id="rId1"/>
   </p:sldMasterIdLst>
   <p:notesMasterIdLst>
-    <p:notesMasterId r:id="rId10"/>
+    <p:notesMasterId r:id="rId11"/>
   </p:notesMasterIdLst>
   <p:sldIdLst>
     <p:sldId id="256" r:id="rId2"/>
@@ -16,6 +16,7 @@
     <p:sldId id="259" r:id="rId7"/>
     <p:sldId id="260" r:id="rId8"/>
     <p:sldId id="262" r:id="rId9"/>
+    <p:sldId id="267" r:id="rId10"/>
   </p:sldIdLst>
   <p:sldSz cx="25199975" cy="10799763"/>
   <p:notesSz cx="6858000" cy="9144000"/>
@@ -125,7 +126,7 @@
 <file path=ppt/revisionInfo.xml><?xml version="1.0" encoding="utf-8"?>
 <p1510:revInfo xmlns:a="http://schemas.openxmlformats.org/drawingml/2006/main" xmlns:r="http://schemas.openxmlformats.org/officeDocument/2006/relationships" xmlns:p1510="http://schemas.microsoft.com/office/powerpoint/2015/10/main">
   <p1510:revLst>
-    <p1510:client id="{2522D23B-2246-44DA-9FD6-73BB8720D876}" v="24" dt="2026-03-02T11:53:43.578"/>
+    <p1510:client id="{2522D23B-2246-44DA-9FD6-73BB8720D876}" v="35" dt="2026-03-05T09:56:52.035"/>
   </p1510:revLst>
 </p1510:revInfo>
 </file>
@@ -135,7 +136,7 @@
   <pc:docChgLst>
     <pc:chgData name="황경하" userId="89f64ca3-534b-430b-acdd-e699c6ed959a" providerId="ADAL" clId="{2876A8CB-C35D-455B-A256-AB2AE2D4B55A}"/>
     <pc:docChg chg="undo custSel addSld delSld modSld modMainMaster modNotesMaster">
-      <pc:chgData name="황경하" userId="89f64ca3-534b-430b-acdd-e699c6ed959a" providerId="ADAL" clId="{2876A8CB-C35D-455B-A256-AB2AE2D4B55A}" dt="2026-03-02T12:22:58.547" v="389" actId="47"/>
+      <pc:chgData name="황경하" userId="89f64ca3-534b-430b-acdd-e699c6ed959a" providerId="ADAL" clId="{2876A8CB-C35D-455B-A256-AB2AE2D4B55A}" dt="2026-03-05T09:57:06.429" v="525" actId="14100"/>
       <pc:docMkLst>
         <pc:docMk/>
       </pc:docMkLst>
@@ -145,116 +146,12 @@
           <pc:docMk/>
           <pc:sldMk cId="4090786216" sldId="256"/>
         </pc:sldMkLst>
-        <pc:spChg chg="add del mod">
-          <ac:chgData name="황경하" userId="89f64ca3-534b-430b-acdd-e699c6ed959a" providerId="ADAL" clId="{2876A8CB-C35D-455B-A256-AB2AE2D4B55A}" dt="2026-03-02T11:06:51.528" v="228" actId="478"/>
-          <ac:spMkLst>
-            <pc:docMk/>
-            <pc:sldMk cId="4090786216" sldId="256"/>
-            <ac:spMk id="3" creationId="{D52765C3-99DA-824D-6CDA-48D8529AF09A}"/>
-          </ac:spMkLst>
-        </pc:spChg>
-        <pc:spChg chg="mod">
-          <ac:chgData name="황경하" userId="89f64ca3-534b-430b-acdd-e699c6ed959a" providerId="ADAL" clId="{2876A8CB-C35D-455B-A256-AB2AE2D4B55A}" dt="2026-03-02T11:04:23.109" v="147"/>
-          <ac:spMkLst>
-            <pc:docMk/>
-            <pc:sldMk cId="4090786216" sldId="256"/>
-            <ac:spMk id="6" creationId="{2CAC1791-E627-DFEF-3C27-FD550CD70873}"/>
-          </ac:spMkLst>
-        </pc:spChg>
-        <pc:spChg chg="add del mod">
-          <ac:chgData name="황경하" userId="89f64ca3-534b-430b-acdd-e699c6ed959a" providerId="ADAL" clId="{2876A8CB-C35D-455B-A256-AB2AE2D4B55A}" dt="2026-03-02T11:06:51.528" v="228" actId="478"/>
-          <ac:spMkLst>
-            <pc:docMk/>
-            <pc:sldMk cId="4090786216" sldId="256"/>
-            <ac:spMk id="9" creationId="{8F009C86-2EA7-B8B4-97D9-29A1CDB253FD}"/>
-          </ac:spMkLst>
-        </pc:spChg>
-        <pc:spChg chg="add del mod">
-          <ac:chgData name="황경하" userId="89f64ca3-534b-430b-acdd-e699c6ed959a" providerId="ADAL" clId="{2876A8CB-C35D-455B-A256-AB2AE2D4B55A}" dt="2026-03-02T11:06:51.528" v="228" actId="478"/>
-          <ac:spMkLst>
-            <pc:docMk/>
-            <pc:sldMk cId="4090786216" sldId="256"/>
-            <ac:spMk id="10" creationId="{75870755-6119-0F0F-7A3C-3ED75DCC71C2}"/>
-          </ac:spMkLst>
-        </pc:spChg>
-        <pc:spChg chg="add del mod">
-          <ac:chgData name="황경하" userId="89f64ca3-534b-430b-acdd-e699c6ed959a" providerId="ADAL" clId="{2876A8CB-C35D-455B-A256-AB2AE2D4B55A}" dt="2026-03-02T11:06:51.528" v="228" actId="478"/>
-          <ac:spMkLst>
-            <pc:docMk/>
-            <pc:sldMk cId="4090786216" sldId="256"/>
-            <ac:spMk id="11" creationId="{7C0B95EC-5C8A-BB18-3DA3-FAE01B8862DD}"/>
-          </ac:spMkLst>
-        </pc:spChg>
-        <pc:spChg chg="add del mod">
-          <ac:chgData name="황경하" userId="89f64ca3-534b-430b-acdd-e699c6ed959a" providerId="ADAL" clId="{2876A8CB-C35D-455B-A256-AB2AE2D4B55A}" dt="2026-03-02T11:06:51.528" v="228" actId="478"/>
-          <ac:spMkLst>
-            <pc:docMk/>
-            <pc:sldMk cId="4090786216" sldId="256"/>
-            <ac:spMk id="12" creationId="{4CA0A881-53A3-024B-4645-54F66934B9D2}"/>
-          </ac:spMkLst>
-        </pc:spChg>
-        <pc:grpChg chg="del mod">
-          <ac:chgData name="황경하" userId="89f64ca3-534b-430b-acdd-e699c6ed959a" providerId="ADAL" clId="{2876A8CB-C35D-455B-A256-AB2AE2D4B55A}" dt="2026-03-02T11:06:51.528" v="228" actId="478"/>
-          <ac:grpSpMkLst>
-            <pc:docMk/>
-            <pc:sldMk cId="4090786216" sldId="256"/>
-            <ac:grpSpMk id="4" creationId="{9E283170-CDB5-25CB-8270-AFC361AE1221}"/>
-          </ac:grpSpMkLst>
-        </pc:grpChg>
-        <pc:grpChg chg="add del mod">
-          <ac:chgData name="황경하" userId="89f64ca3-534b-430b-acdd-e699c6ed959a" providerId="ADAL" clId="{2876A8CB-C35D-455B-A256-AB2AE2D4B55A}" dt="2026-03-02T11:05:46.338" v="201" actId="165"/>
-          <ac:grpSpMkLst>
-            <pc:docMk/>
-            <pc:sldMk cId="4090786216" sldId="256"/>
-            <ac:grpSpMk id="13" creationId="{C23A2929-E922-5E41-D17E-8DF935B8EB5F}"/>
-          </ac:grpSpMkLst>
-        </pc:grpChg>
-        <pc:picChg chg="add del mod">
-          <ac:chgData name="황경하" userId="89f64ca3-534b-430b-acdd-e699c6ed959a" providerId="ADAL" clId="{2876A8CB-C35D-455B-A256-AB2AE2D4B55A}" dt="2026-03-02T11:06:51.528" v="228" actId="478"/>
-          <ac:picMkLst>
-            <pc:docMk/>
-            <pc:sldMk cId="4090786216" sldId="256"/>
-            <ac:picMk id="2" creationId="{ABFB763F-DB64-A013-B2CC-F124B7887240}"/>
-          </ac:picMkLst>
-        </pc:picChg>
-        <pc:picChg chg="mod">
-          <ac:chgData name="황경하" userId="89f64ca3-534b-430b-acdd-e699c6ed959a" providerId="ADAL" clId="{2876A8CB-C35D-455B-A256-AB2AE2D4B55A}" dt="2026-03-02T11:04:23.109" v="147"/>
-          <ac:picMkLst>
-            <pc:docMk/>
-            <pc:sldMk cId="4090786216" sldId="256"/>
-            <ac:picMk id="5" creationId="{15FD03EC-7747-81BB-2048-6AA0781F9A24}"/>
-          </ac:picMkLst>
-        </pc:picChg>
-        <pc:picChg chg="add del mod">
-          <ac:chgData name="황경하" userId="89f64ca3-534b-430b-acdd-e699c6ed959a" providerId="ADAL" clId="{2876A8CB-C35D-455B-A256-AB2AE2D4B55A}" dt="2026-03-02T11:06:51.528" v="228" actId="478"/>
-          <ac:picMkLst>
-            <pc:docMk/>
-            <pc:sldMk cId="4090786216" sldId="256"/>
-            <ac:picMk id="7" creationId="{B265A40F-122C-A41C-E6CD-F632F80EB263}"/>
-          </ac:picMkLst>
-        </pc:picChg>
-        <pc:picChg chg="add del mod">
-          <ac:chgData name="황경하" userId="89f64ca3-534b-430b-acdd-e699c6ed959a" providerId="ADAL" clId="{2876A8CB-C35D-455B-A256-AB2AE2D4B55A}" dt="2026-03-02T11:06:51.528" v="228" actId="478"/>
-          <ac:picMkLst>
-            <pc:docMk/>
-            <pc:sldMk cId="4090786216" sldId="256"/>
-            <ac:picMk id="8" creationId="{F933FBCB-2BF5-BDA4-B390-7FED656CEE1A}"/>
-          </ac:picMkLst>
-        </pc:picChg>
         <pc:picChg chg="mod topLvl">
           <ac:chgData name="황경하" userId="89f64ca3-534b-430b-acdd-e699c6ed959a" providerId="ADAL" clId="{2876A8CB-C35D-455B-A256-AB2AE2D4B55A}" dt="2026-03-02T11:26:30.888" v="296" actId="1035"/>
           <ac:picMkLst>
             <pc:docMk/>
             <pc:sldMk cId="4090786216" sldId="256"/>
             <ac:picMk id="21" creationId="{C5C3DF90-7AD7-788C-BF24-6F6610B6665D}"/>
-          </ac:picMkLst>
-        </pc:picChg>
-        <pc:picChg chg="del mod">
-          <ac:chgData name="황경하" userId="89f64ca3-534b-430b-acdd-e699c6ed959a" providerId="ADAL" clId="{2876A8CB-C35D-455B-A256-AB2AE2D4B55A}" dt="2026-03-02T11:04:32.861" v="151" actId="478"/>
-          <ac:picMkLst>
-            <pc:docMk/>
-            <pc:sldMk cId="4090786216" sldId="256"/>
-            <ac:picMk id="22" creationId="{3F0D542C-26E1-4DD2-3435-2089842F56FA}"/>
           </ac:picMkLst>
         </pc:picChg>
         <pc:picChg chg="add del mod topLvl">
@@ -265,60 +162,12 @@
             <ac:picMk id="23" creationId="{0DA76929-4D92-B3D9-B441-228B7317936E}"/>
           </ac:picMkLst>
         </pc:picChg>
-        <pc:picChg chg="del">
-          <ac:chgData name="황경하" userId="89f64ca3-534b-430b-acdd-e699c6ed959a" providerId="ADAL" clId="{2876A8CB-C35D-455B-A256-AB2AE2D4B55A}" dt="2026-03-02T10:56:06.050" v="0" actId="478"/>
-          <ac:picMkLst>
-            <pc:docMk/>
-            <pc:sldMk cId="4090786216" sldId="256"/>
-            <ac:picMk id="24" creationId="{FA3FD6CE-1432-A59E-26D8-F8C84332BF9A}"/>
-          </ac:picMkLst>
-        </pc:picChg>
-        <pc:picChg chg="del">
-          <ac:chgData name="황경하" userId="89f64ca3-534b-430b-acdd-e699c6ed959a" providerId="ADAL" clId="{2876A8CB-C35D-455B-A256-AB2AE2D4B55A}" dt="2026-03-02T10:56:06.050" v="0" actId="478"/>
-          <ac:picMkLst>
-            <pc:docMk/>
-            <pc:sldMk cId="4090786216" sldId="256"/>
-            <ac:picMk id="25" creationId="{8C4BED2F-F70E-8F37-94FC-A6958CEEE869}"/>
-          </ac:picMkLst>
-        </pc:picChg>
-        <pc:picChg chg="del">
-          <ac:chgData name="황경하" userId="89f64ca3-534b-430b-acdd-e699c6ed959a" providerId="ADAL" clId="{2876A8CB-C35D-455B-A256-AB2AE2D4B55A}" dt="2026-03-02T10:56:06.050" v="0" actId="478"/>
-          <ac:picMkLst>
-            <pc:docMk/>
-            <pc:sldMk cId="4090786216" sldId="256"/>
-            <ac:picMk id="26" creationId="{F3C66147-5B13-F3E4-4EA9-23F29415C11C}"/>
-          </ac:picMkLst>
-        </pc:picChg>
-        <pc:picChg chg="del">
-          <ac:chgData name="황경하" userId="89f64ca3-534b-430b-acdd-e699c6ed959a" providerId="ADAL" clId="{2876A8CB-C35D-455B-A256-AB2AE2D4B55A}" dt="2026-03-02T10:56:06.050" v="0" actId="478"/>
-          <ac:picMkLst>
-            <pc:docMk/>
-            <pc:sldMk cId="4090786216" sldId="256"/>
-            <ac:picMk id="27" creationId="{9B3A4FA8-496B-E1B0-F5E0-121AC685039C}"/>
-          </ac:picMkLst>
-        </pc:picChg>
-        <pc:picChg chg="del">
-          <ac:chgData name="황경하" userId="89f64ca3-534b-430b-acdd-e699c6ed959a" providerId="ADAL" clId="{2876A8CB-C35D-455B-A256-AB2AE2D4B55A}" dt="2026-03-02T10:56:06.050" v="0" actId="478"/>
-          <ac:picMkLst>
-            <pc:docMk/>
-            <pc:sldMk cId="4090786216" sldId="256"/>
-            <ac:picMk id="28" creationId="{DAC3BC97-6381-818F-8AB0-99E1BFBD7855}"/>
-          </ac:picMkLst>
-        </pc:picChg>
         <pc:picChg chg="mod topLvl">
           <ac:chgData name="황경하" userId="89f64ca3-534b-430b-acdd-e699c6ed959a" providerId="ADAL" clId="{2876A8CB-C35D-455B-A256-AB2AE2D4B55A}" dt="2026-03-02T11:26:08.441" v="276" actId="14100"/>
           <ac:picMkLst>
             <pc:docMk/>
             <pc:sldMk cId="4090786216" sldId="256"/>
             <ac:picMk id="29" creationId="{1DA72604-8408-00CB-2275-68810AF6B4E0}"/>
-          </ac:picMkLst>
-        </pc:picChg>
-        <pc:picChg chg="del mod">
-          <ac:chgData name="황경하" userId="89f64ca3-534b-430b-acdd-e699c6ed959a" providerId="ADAL" clId="{2876A8CB-C35D-455B-A256-AB2AE2D4B55A}" dt="2026-03-02T11:04:32.861" v="151" actId="478"/>
-          <ac:picMkLst>
-            <pc:docMk/>
-            <pc:sldMk cId="4090786216" sldId="256"/>
-            <ac:picMk id="30" creationId="{CAAEFC2B-13EF-632D-DA7F-BD781FECFA5A}"/>
           </ac:picMkLst>
         </pc:picChg>
         <pc:picChg chg="add del mod topLvl">
@@ -329,46 +178,6 @@
             <ac:picMk id="31" creationId="{9586A509-D6D7-6306-3C07-23FB715F96C5}"/>
           </ac:picMkLst>
         </pc:picChg>
-        <pc:picChg chg="del">
-          <ac:chgData name="황경하" userId="89f64ca3-534b-430b-acdd-e699c6ed959a" providerId="ADAL" clId="{2876A8CB-C35D-455B-A256-AB2AE2D4B55A}" dt="2026-03-02T10:56:06.050" v="0" actId="478"/>
-          <ac:picMkLst>
-            <pc:docMk/>
-            <pc:sldMk cId="4090786216" sldId="256"/>
-            <ac:picMk id="32" creationId="{CBED1F28-24FD-6266-8103-05DD68B4BE11}"/>
-          </ac:picMkLst>
-        </pc:picChg>
-        <pc:picChg chg="del">
-          <ac:chgData name="황경하" userId="89f64ca3-534b-430b-acdd-e699c6ed959a" providerId="ADAL" clId="{2876A8CB-C35D-455B-A256-AB2AE2D4B55A}" dt="2026-03-02T10:56:06.050" v="0" actId="478"/>
-          <ac:picMkLst>
-            <pc:docMk/>
-            <pc:sldMk cId="4090786216" sldId="256"/>
-            <ac:picMk id="33" creationId="{BB1723ED-0B0D-FF75-FC86-2DB27B152A75}"/>
-          </ac:picMkLst>
-        </pc:picChg>
-        <pc:picChg chg="del">
-          <ac:chgData name="황경하" userId="89f64ca3-534b-430b-acdd-e699c6ed959a" providerId="ADAL" clId="{2876A8CB-C35D-455B-A256-AB2AE2D4B55A}" dt="2026-03-02T10:56:06.050" v="0" actId="478"/>
-          <ac:picMkLst>
-            <pc:docMk/>
-            <pc:sldMk cId="4090786216" sldId="256"/>
-            <ac:picMk id="34" creationId="{89891584-791D-DD68-25D8-2A607BD703D5}"/>
-          </ac:picMkLst>
-        </pc:picChg>
-        <pc:picChg chg="del">
-          <ac:chgData name="황경하" userId="89f64ca3-534b-430b-acdd-e699c6ed959a" providerId="ADAL" clId="{2876A8CB-C35D-455B-A256-AB2AE2D4B55A}" dt="2026-03-02T10:56:06.050" v="0" actId="478"/>
-          <ac:picMkLst>
-            <pc:docMk/>
-            <pc:sldMk cId="4090786216" sldId="256"/>
-            <ac:picMk id="35" creationId="{9F95E211-6D4A-5574-31C7-62ED8E93D97A}"/>
-          </ac:picMkLst>
-        </pc:picChg>
-        <pc:picChg chg="del">
-          <ac:chgData name="황경하" userId="89f64ca3-534b-430b-acdd-e699c6ed959a" providerId="ADAL" clId="{2876A8CB-C35D-455B-A256-AB2AE2D4B55A}" dt="2026-03-02T10:56:06.050" v="0" actId="478"/>
-          <ac:picMkLst>
-            <pc:docMk/>
-            <pc:sldMk cId="4090786216" sldId="256"/>
-            <ac:picMk id="36" creationId="{805308CA-1EC9-04E6-F4B5-C283BBB14CAD}"/>
-          </ac:picMkLst>
-        </pc:picChg>
       </pc:sldChg>
       <pc:sldChg chg="delSp modSp mod modNotes">
         <pc:chgData name="황경하" userId="89f64ca3-534b-430b-acdd-e699c6ed959a" providerId="ADAL" clId="{2876A8CB-C35D-455B-A256-AB2AE2D4B55A}" dt="2026-03-02T10:59:53.410" v="99" actId="1035"/>
@@ -376,14 +185,6 @@
           <pc:docMk/>
           <pc:sldMk cId="1122876932" sldId="257"/>
         </pc:sldMkLst>
-        <pc:spChg chg="del">
-          <ac:chgData name="황경하" userId="89f64ca3-534b-430b-acdd-e699c6ed959a" providerId="ADAL" clId="{2876A8CB-C35D-455B-A256-AB2AE2D4B55A}" dt="2026-03-02T10:59:23.992" v="65" actId="478"/>
-          <ac:spMkLst>
-            <pc:docMk/>
-            <pc:sldMk cId="1122876932" sldId="257"/>
-            <ac:spMk id="2" creationId="{B927D361-A1E5-62E8-6D23-D64B480B4EA5}"/>
-          </ac:spMkLst>
-        </pc:spChg>
         <pc:spChg chg="mod">
           <ac:chgData name="황경하" userId="89f64ca3-534b-430b-acdd-e699c6ed959a" providerId="ADAL" clId="{2876A8CB-C35D-455B-A256-AB2AE2D4B55A}" dt="2026-03-02T10:59:43.432" v="90" actId="1035"/>
           <ac:spMkLst>
@@ -576,62 +377,6 @@
             <ac:spMk id="79" creationId="{C2BAF1E2-A07B-7F95-99AB-F3142F837DE5}"/>
           </ac:spMkLst>
         </pc:spChg>
-        <pc:spChg chg="del">
-          <ac:chgData name="황경하" userId="89f64ca3-534b-430b-acdd-e699c6ed959a" providerId="ADAL" clId="{2876A8CB-C35D-455B-A256-AB2AE2D4B55A}" dt="2026-03-02T10:58:58.078" v="63" actId="478"/>
-          <ac:spMkLst>
-            <pc:docMk/>
-            <pc:sldMk cId="1122876932" sldId="257"/>
-            <ac:spMk id="84" creationId="{DCE70C2B-E364-8F55-B59C-BE1203A18FFE}"/>
-          </ac:spMkLst>
-        </pc:spChg>
-        <pc:spChg chg="del mod">
-          <ac:chgData name="황경하" userId="89f64ca3-534b-430b-acdd-e699c6ed959a" providerId="ADAL" clId="{2876A8CB-C35D-455B-A256-AB2AE2D4B55A}" dt="2026-03-02T10:58:55.507" v="62" actId="478"/>
-          <ac:spMkLst>
-            <pc:docMk/>
-            <pc:sldMk cId="1122876932" sldId="257"/>
-            <ac:spMk id="86" creationId="{04C50329-00DE-6151-EED3-6FB81D4E7103}"/>
-          </ac:spMkLst>
-        </pc:spChg>
-        <pc:spChg chg="mod">
-          <ac:chgData name="황경하" userId="89f64ca3-534b-430b-acdd-e699c6ed959a" providerId="ADAL" clId="{2876A8CB-C35D-455B-A256-AB2AE2D4B55A}" dt="2026-03-02T10:57:51.514" v="45" actId="1076"/>
-          <ac:spMkLst>
-            <pc:docMk/>
-            <pc:sldMk cId="1122876932" sldId="257"/>
-            <ac:spMk id="87" creationId="{6EDBDD69-2CBD-3E06-DE23-EF51A19E03C9}"/>
-          </ac:spMkLst>
-        </pc:spChg>
-        <pc:spChg chg="del mod">
-          <ac:chgData name="황경하" userId="89f64ca3-534b-430b-acdd-e699c6ed959a" providerId="ADAL" clId="{2876A8CB-C35D-455B-A256-AB2AE2D4B55A}" dt="2026-03-02T10:58:55.507" v="62" actId="478"/>
-          <ac:spMkLst>
-            <pc:docMk/>
-            <pc:sldMk cId="1122876932" sldId="257"/>
-            <ac:spMk id="89" creationId="{CD0E8EB2-6A1E-64D2-2633-1621E729CABD}"/>
-          </ac:spMkLst>
-        </pc:spChg>
-        <pc:spChg chg="del mod">
-          <ac:chgData name="황경하" userId="89f64ca3-534b-430b-acdd-e699c6ed959a" providerId="ADAL" clId="{2876A8CB-C35D-455B-A256-AB2AE2D4B55A}" dt="2026-03-02T10:58:55.507" v="62" actId="478"/>
-          <ac:spMkLst>
-            <pc:docMk/>
-            <pc:sldMk cId="1122876932" sldId="257"/>
-            <ac:spMk id="90" creationId="{890D93C9-6BDA-01A1-9704-58982455C6BA}"/>
-          </ac:spMkLst>
-        </pc:spChg>
-        <pc:spChg chg="mod">
-          <ac:chgData name="황경하" userId="89f64ca3-534b-430b-acdd-e699c6ed959a" providerId="ADAL" clId="{2876A8CB-C35D-455B-A256-AB2AE2D4B55A}" dt="2026-03-02T10:57:51.514" v="45" actId="1076"/>
-          <ac:spMkLst>
-            <pc:docMk/>
-            <pc:sldMk cId="1122876932" sldId="257"/>
-            <ac:spMk id="91" creationId="{9AED16F3-A108-4CB6-B044-4122BE8DD3C3}"/>
-          </ac:spMkLst>
-        </pc:spChg>
-        <pc:spChg chg="del mod">
-          <ac:chgData name="황경하" userId="89f64ca3-534b-430b-acdd-e699c6ed959a" providerId="ADAL" clId="{2876A8CB-C35D-455B-A256-AB2AE2D4B55A}" dt="2026-03-02T10:58:55.507" v="62" actId="478"/>
-          <ac:spMkLst>
-            <pc:docMk/>
-            <pc:sldMk cId="1122876932" sldId="257"/>
-            <ac:spMk id="92" creationId="{4224B03B-3B08-7F0C-EABD-CBE558BB1E3B}"/>
-          </ac:spMkLst>
-        </pc:spChg>
         <pc:spChg chg="mod">
           <ac:chgData name="황경하" userId="89f64ca3-534b-430b-acdd-e699c6ed959a" providerId="ADAL" clId="{2876A8CB-C35D-455B-A256-AB2AE2D4B55A}" dt="2026-03-02T10:59:53.410" v="99" actId="1035"/>
           <ac:spMkLst>
@@ -648,86 +393,6 @@
             <ac:spMk id="107" creationId="{8D99292E-079C-68B7-7490-5F641DF9B63C}"/>
           </ac:spMkLst>
         </pc:spChg>
-        <pc:spChg chg="del mod">
-          <ac:chgData name="황경하" userId="89f64ca3-534b-430b-acdd-e699c6ed959a" providerId="ADAL" clId="{2876A8CB-C35D-455B-A256-AB2AE2D4B55A}" dt="2026-03-02T10:58:55.507" v="62" actId="478"/>
-          <ac:spMkLst>
-            <pc:docMk/>
-            <pc:sldMk cId="1122876932" sldId="257"/>
-            <ac:spMk id="108" creationId="{B9A76CC5-7BCC-D7E3-07D2-884801371193}"/>
-          </ac:spMkLst>
-        </pc:spChg>
-        <pc:spChg chg="del mod">
-          <ac:chgData name="황경하" userId="89f64ca3-534b-430b-acdd-e699c6ed959a" providerId="ADAL" clId="{2876A8CB-C35D-455B-A256-AB2AE2D4B55A}" dt="2026-03-02T10:58:55.507" v="62" actId="478"/>
-          <ac:spMkLst>
-            <pc:docMk/>
-            <pc:sldMk cId="1122876932" sldId="257"/>
-            <ac:spMk id="109" creationId="{E95DF0C6-443E-46A8-1DC6-E42B56E10D77}"/>
-          </ac:spMkLst>
-        </pc:spChg>
-        <pc:spChg chg="mod">
-          <ac:chgData name="황경하" userId="89f64ca3-534b-430b-acdd-e699c6ed959a" providerId="ADAL" clId="{2876A8CB-C35D-455B-A256-AB2AE2D4B55A}" dt="2026-03-02T10:56:35.957" v="2"/>
-          <ac:spMkLst>
-            <pc:docMk/>
-            <pc:sldMk cId="1122876932" sldId="257"/>
-            <ac:spMk id="112" creationId="{D6EA56E1-5BBC-BC4E-F50C-9A960DAE5D73}"/>
-          </ac:spMkLst>
-        </pc:spChg>
-        <pc:spChg chg="del">
-          <ac:chgData name="황경하" userId="89f64ca3-534b-430b-acdd-e699c6ed959a" providerId="ADAL" clId="{2876A8CB-C35D-455B-A256-AB2AE2D4B55A}" dt="2026-03-02T10:58:55.507" v="62" actId="478"/>
-          <ac:spMkLst>
-            <pc:docMk/>
-            <pc:sldMk cId="1122876932" sldId="257"/>
-            <ac:spMk id="113" creationId="{A5C80941-17BF-5700-3A6F-D0C9F4188555}"/>
-          </ac:spMkLst>
-        </pc:spChg>
-        <pc:spChg chg="del mod">
-          <ac:chgData name="황경하" userId="89f64ca3-534b-430b-acdd-e699c6ed959a" providerId="ADAL" clId="{2876A8CB-C35D-455B-A256-AB2AE2D4B55A}" dt="2026-03-02T10:58:55.507" v="62" actId="478"/>
-          <ac:spMkLst>
-            <pc:docMk/>
-            <pc:sldMk cId="1122876932" sldId="257"/>
-            <ac:spMk id="114" creationId="{42FBFB37-0F4A-8298-9DC2-3FC57E1DD9C8}"/>
-          </ac:spMkLst>
-        </pc:spChg>
-        <pc:spChg chg="del mod">
-          <ac:chgData name="황경하" userId="89f64ca3-534b-430b-acdd-e699c6ed959a" providerId="ADAL" clId="{2876A8CB-C35D-455B-A256-AB2AE2D4B55A}" dt="2026-03-02T10:58:55.507" v="62" actId="478"/>
-          <ac:spMkLst>
-            <pc:docMk/>
-            <pc:sldMk cId="1122876932" sldId="257"/>
-            <ac:spMk id="115" creationId="{7F0D6DC3-AE4D-CA73-001C-2638E5A71C53}"/>
-          </ac:spMkLst>
-        </pc:spChg>
-        <pc:spChg chg="del mod">
-          <ac:chgData name="황경하" userId="89f64ca3-534b-430b-acdd-e699c6ed959a" providerId="ADAL" clId="{2876A8CB-C35D-455B-A256-AB2AE2D4B55A}" dt="2026-03-02T10:58:55.507" v="62" actId="478"/>
-          <ac:spMkLst>
-            <pc:docMk/>
-            <pc:sldMk cId="1122876932" sldId="257"/>
-            <ac:spMk id="116" creationId="{EF8C73AE-232D-A67A-211D-B1A772EC4DD7}"/>
-          </ac:spMkLst>
-        </pc:spChg>
-        <pc:grpChg chg="mod">
-          <ac:chgData name="황경하" userId="89f64ca3-534b-430b-acdd-e699c6ed959a" providerId="ADAL" clId="{2876A8CB-C35D-455B-A256-AB2AE2D4B55A}" dt="2026-03-02T10:58:03.219" v="48" actId="1076"/>
-          <ac:grpSpMkLst>
-            <pc:docMk/>
-            <pc:sldMk cId="1122876932" sldId="257"/>
-            <ac:grpSpMk id="94" creationId="{F99688AC-538A-6D66-8E08-902321C9033B}"/>
-          </ac:grpSpMkLst>
-        </pc:grpChg>
-        <pc:grpChg chg="mod">
-          <ac:chgData name="황경하" userId="89f64ca3-534b-430b-acdd-e699c6ed959a" providerId="ADAL" clId="{2876A8CB-C35D-455B-A256-AB2AE2D4B55A}" dt="2026-03-02T10:58:38.347" v="57" actId="1076"/>
-          <ac:grpSpMkLst>
-            <pc:docMk/>
-            <pc:sldMk cId="1122876932" sldId="257"/>
-            <ac:grpSpMk id="97" creationId="{4936402B-A8B2-B0BA-19D1-F2583248CACE}"/>
-          </ac:grpSpMkLst>
-        </pc:grpChg>
-        <pc:grpChg chg="del mod">
-          <ac:chgData name="황경하" userId="89f64ca3-534b-430b-acdd-e699c6ed959a" providerId="ADAL" clId="{2876A8CB-C35D-455B-A256-AB2AE2D4B55A}" dt="2026-03-02T10:58:46.519" v="60" actId="478"/>
-          <ac:grpSpMkLst>
-            <pc:docMk/>
-            <pc:sldMk cId="1122876932" sldId="257"/>
-            <ac:grpSpMk id="110" creationId="{114B2D17-EDD0-2502-AF7C-6C4CA1496F0B}"/>
-          </ac:grpSpMkLst>
-        </pc:grpChg>
         <pc:cxnChg chg="mod">
           <ac:chgData name="황경하" userId="89f64ca3-534b-430b-acdd-e699c6ed959a" providerId="ADAL" clId="{2876A8CB-C35D-455B-A256-AB2AE2D4B55A}" dt="2026-03-02T10:56:58.002" v="8" actId="1036"/>
           <ac:cxnSpMkLst>
@@ -742,14 +407,6 @@
             <pc:docMk/>
             <pc:sldMk cId="1122876932" sldId="257"/>
             <ac:cxnSpMk id="21" creationId="{57ED3E60-8E84-03FB-930B-E781589C4407}"/>
-          </ac:cxnSpMkLst>
-        </pc:cxnChg>
-        <pc:cxnChg chg="del">
-          <ac:chgData name="황경하" userId="89f64ca3-534b-430b-acdd-e699c6ed959a" providerId="ADAL" clId="{2876A8CB-C35D-455B-A256-AB2AE2D4B55A}" dt="2026-03-02T10:58:58.078" v="63" actId="478"/>
-          <ac:cxnSpMkLst>
-            <pc:docMk/>
-            <pc:sldMk cId="1122876932" sldId="257"/>
-            <ac:cxnSpMk id="81" creationId="{57C43760-F3BC-3BA9-E3B2-717BD0DE4A9F}"/>
           </ac:cxnSpMkLst>
         </pc:cxnChg>
         <pc:cxnChg chg="mod">
@@ -777,107 +434,12 @@
           </ac:cxnSpMkLst>
         </pc:cxnChg>
       </pc:sldChg>
-      <pc:sldChg chg="modSp del modNotes">
-        <pc:chgData name="황경하" userId="89f64ca3-534b-430b-acdd-e699c6ed959a" providerId="ADAL" clId="{2876A8CB-C35D-455B-A256-AB2AE2D4B55A}" dt="2026-03-02T11:03:23.918" v="146" actId="47"/>
-        <pc:sldMkLst>
-          <pc:docMk/>
-          <pc:sldMk cId="1364625367" sldId="258"/>
-        </pc:sldMkLst>
-        <pc:spChg chg="mod">
-          <ac:chgData name="황경하" userId="89f64ca3-534b-430b-acdd-e699c6ed959a" providerId="ADAL" clId="{2876A8CB-C35D-455B-A256-AB2AE2D4B55A}" dt="2026-03-02T10:56:35.957" v="2"/>
-          <ac:spMkLst>
-            <pc:docMk/>
-            <pc:sldMk cId="1364625367" sldId="258"/>
-            <ac:spMk id="4" creationId="{32AC69D4-7F5C-BB18-B042-0D4A7CEE55D5}"/>
-          </ac:spMkLst>
-        </pc:spChg>
-        <pc:spChg chg="mod">
-          <ac:chgData name="황경하" userId="89f64ca3-534b-430b-acdd-e699c6ed959a" providerId="ADAL" clId="{2876A8CB-C35D-455B-A256-AB2AE2D4B55A}" dt="2026-03-02T10:56:35.957" v="2"/>
-          <ac:spMkLst>
-            <pc:docMk/>
-            <pc:sldMk cId="1364625367" sldId="258"/>
-            <ac:spMk id="7" creationId="{46FAE0DD-D0C2-77DF-3AAE-704FE862959B}"/>
-          </ac:spMkLst>
-        </pc:spChg>
-        <pc:spChg chg="mod">
-          <ac:chgData name="황경하" userId="89f64ca3-534b-430b-acdd-e699c6ed959a" providerId="ADAL" clId="{2876A8CB-C35D-455B-A256-AB2AE2D4B55A}" dt="2026-03-02T10:56:35.957" v="2"/>
-          <ac:spMkLst>
-            <pc:docMk/>
-            <pc:sldMk cId="1364625367" sldId="258"/>
-            <ac:spMk id="8" creationId="{0E8360F1-FAF5-00C2-C37D-D92D5BB947D7}"/>
-          </ac:spMkLst>
-        </pc:spChg>
-        <pc:spChg chg="mod">
-          <ac:chgData name="황경하" userId="89f64ca3-534b-430b-acdd-e699c6ed959a" providerId="ADAL" clId="{2876A8CB-C35D-455B-A256-AB2AE2D4B55A}" dt="2026-03-02T10:56:35.957" v="2"/>
-          <ac:spMkLst>
-            <pc:docMk/>
-            <pc:sldMk cId="1364625367" sldId="258"/>
-            <ac:spMk id="9" creationId="{754C033C-FAF8-4334-C0AC-7CF39090414C}"/>
-          </ac:spMkLst>
-        </pc:spChg>
-        <pc:spChg chg="mod">
-          <ac:chgData name="황경하" userId="89f64ca3-534b-430b-acdd-e699c6ed959a" providerId="ADAL" clId="{2876A8CB-C35D-455B-A256-AB2AE2D4B55A}" dt="2026-03-02T10:56:35.957" v="2"/>
-          <ac:spMkLst>
-            <pc:docMk/>
-            <pc:sldMk cId="1364625367" sldId="258"/>
-            <ac:spMk id="10" creationId="{AB0071C0-6EF6-BEDA-F539-3ADD0CA7F471}"/>
-          </ac:spMkLst>
-        </pc:spChg>
-        <pc:spChg chg="mod">
-          <ac:chgData name="황경하" userId="89f64ca3-534b-430b-acdd-e699c6ed959a" providerId="ADAL" clId="{2876A8CB-C35D-455B-A256-AB2AE2D4B55A}" dt="2026-03-02T10:56:35.957" v="2"/>
-          <ac:spMkLst>
-            <pc:docMk/>
-            <pc:sldMk cId="1364625367" sldId="258"/>
-            <ac:spMk id="11" creationId="{B4A75D8F-9985-2C38-C270-BB38D4904819}"/>
-          </ac:spMkLst>
-        </pc:spChg>
-        <pc:spChg chg="mod">
-          <ac:chgData name="황경하" userId="89f64ca3-534b-430b-acdd-e699c6ed959a" providerId="ADAL" clId="{2876A8CB-C35D-455B-A256-AB2AE2D4B55A}" dt="2026-03-02T10:56:35.957" v="2"/>
-          <ac:spMkLst>
-            <pc:docMk/>
-            <pc:sldMk cId="1364625367" sldId="258"/>
-            <ac:spMk id="12" creationId="{8AF81F9A-74B6-A772-DB41-687B27B91D38}"/>
-          </ac:spMkLst>
-        </pc:spChg>
-        <pc:spChg chg="mod">
-          <ac:chgData name="황경하" userId="89f64ca3-534b-430b-acdd-e699c6ed959a" providerId="ADAL" clId="{2876A8CB-C35D-455B-A256-AB2AE2D4B55A}" dt="2026-03-02T10:56:35.957" v="2"/>
-          <ac:spMkLst>
-            <pc:docMk/>
-            <pc:sldMk cId="1364625367" sldId="258"/>
-            <ac:spMk id="13" creationId="{61DF683D-F28A-FAE4-7CA3-1A3825AB503D}"/>
-          </ac:spMkLst>
-        </pc:spChg>
-        <pc:spChg chg="mod">
-          <ac:chgData name="황경하" userId="89f64ca3-534b-430b-acdd-e699c6ed959a" providerId="ADAL" clId="{2876A8CB-C35D-455B-A256-AB2AE2D4B55A}" dt="2026-03-02T10:56:35.957" v="2"/>
-          <ac:spMkLst>
-            <pc:docMk/>
-            <pc:sldMk cId="1364625367" sldId="258"/>
-            <ac:spMk id="14" creationId="{3A8A278A-238C-C445-D3ED-487944B03BA4}"/>
-          </ac:spMkLst>
-        </pc:spChg>
-        <pc:graphicFrameChg chg="mod">
-          <ac:chgData name="황경하" userId="89f64ca3-534b-430b-acdd-e699c6ed959a" providerId="ADAL" clId="{2876A8CB-C35D-455B-A256-AB2AE2D4B55A}" dt="2026-03-02T10:56:35.957" v="2"/>
-          <ac:graphicFrameMkLst>
-            <pc:docMk/>
-            <pc:sldMk cId="1364625367" sldId="258"/>
-            <ac:graphicFrameMk id="3" creationId="{D42CB8DA-33EA-8FAA-D951-48B63D4942D4}"/>
-          </ac:graphicFrameMkLst>
-        </pc:graphicFrameChg>
-      </pc:sldChg>
       <pc:sldChg chg="delSp modSp mod">
         <pc:chgData name="황경하" userId="89f64ca3-534b-430b-acdd-e699c6ed959a" providerId="ADAL" clId="{2876A8CB-C35D-455B-A256-AB2AE2D4B55A}" dt="2026-03-02T11:43:58.544" v="364" actId="20577"/>
         <pc:sldMkLst>
           <pc:docMk/>
           <pc:sldMk cId="2223019525" sldId="259"/>
         </pc:sldMkLst>
-        <pc:spChg chg="mod">
-          <ac:chgData name="황경하" userId="89f64ca3-534b-430b-acdd-e699c6ed959a" providerId="ADAL" clId="{2876A8CB-C35D-455B-A256-AB2AE2D4B55A}" dt="2026-03-02T10:56:35.957" v="2"/>
-          <ac:spMkLst>
-            <pc:docMk/>
-            <pc:sldMk cId="2223019525" sldId="259"/>
-            <ac:spMk id="7" creationId="{5CE80FFC-5DB2-4384-83E4-4290947D4E01}"/>
-          </ac:spMkLst>
-        </pc:spChg>
         <pc:spChg chg="mod">
           <ac:chgData name="황경하" userId="89f64ca3-534b-430b-acdd-e699c6ed959a" providerId="ADAL" clId="{2876A8CB-C35D-455B-A256-AB2AE2D4B55A}" dt="2026-03-02T10:56:35.957" v="2"/>
           <ac:spMkLst>
@@ -892,22 +454,6 @@
             <pc:docMk/>
             <pc:sldMk cId="2223019525" sldId="259"/>
             <ac:spMk id="13" creationId="{DD7B3678-2C87-EF39-4E1E-B45F37A079D2}"/>
-          </ac:spMkLst>
-        </pc:spChg>
-        <pc:spChg chg="mod">
-          <ac:chgData name="황경하" userId="89f64ca3-534b-430b-acdd-e699c6ed959a" providerId="ADAL" clId="{2876A8CB-C35D-455B-A256-AB2AE2D4B55A}" dt="2026-03-02T10:56:35.957" v="2"/>
-          <ac:spMkLst>
-            <pc:docMk/>
-            <pc:sldMk cId="2223019525" sldId="259"/>
-            <ac:spMk id="16" creationId="{D2C2CB4E-C203-173E-76C8-96DC017FCF0F}"/>
-          </ac:spMkLst>
-        </pc:spChg>
-        <pc:spChg chg="mod">
-          <ac:chgData name="황경하" userId="89f64ca3-534b-430b-acdd-e699c6ed959a" providerId="ADAL" clId="{2876A8CB-C35D-455B-A256-AB2AE2D4B55A}" dt="2026-03-02T10:56:35.957" v="2"/>
-          <ac:spMkLst>
-            <pc:docMk/>
-            <pc:sldMk cId="2223019525" sldId="259"/>
-            <ac:spMk id="19" creationId="{466F6CB5-A09E-0694-BE22-714615F64F5D}"/>
           </ac:spMkLst>
         </pc:spChg>
         <pc:spChg chg="mod">
@@ -958,30 +504,6 @@
             <ac:spMk id="28" creationId="{51B21241-F695-5E5F-642C-03D2558B2659}"/>
           </ac:spMkLst>
         </pc:spChg>
-        <pc:grpChg chg="del">
-          <ac:chgData name="황경하" userId="89f64ca3-534b-430b-acdd-e699c6ed959a" providerId="ADAL" clId="{2876A8CB-C35D-455B-A256-AB2AE2D4B55A}" dt="2026-03-02T11:01:35.598" v="118" actId="478"/>
-          <ac:grpSpMkLst>
-            <pc:docMk/>
-            <pc:sldMk cId="2223019525" sldId="259"/>
-            <ac:grpSpMk id="5" creationId="{32C65185-A400-BC0F-11D1-0AEF2D160B62}"/>
-          </ac:grpSpMkLst>
-        </pc:grpChg>
-        <pc:grpChg chg="del">
-          <ac:chgData name="황경하" userId="89f64ca3-534b-430b-acdd-e699c6ed959a" providerId="ADAL" clId="{2876A8CB-C35D-455B-A256-AB2AE2D4B55A}" dt="2026-03-02T11:01:35.598" v="118" actId="478"/>
-          <ac:grpSpMkLst>
-            <pc:docMk/>
-            <pc:sldMk cId="2223019525" sldId="259"/>
-            <ac:grpSpMk id="14" creationId="{1854156D-5019-746B-5C32-D7CE4B0989E6}"/>
-          </ac:grpSpMkLst>
-        </pc:grpChg>
-        <pc:grpChg chg="del">
-          <ac:chgData name="황경하" userId="89f64ca3-534b-430b-acdd-e699c6ed959a" providerId="ADAL" clId="{2876A8CB-C35D-455B-A256-AB2AE2D4B55A}" dt="2026-03-02T11:01:35.598" v="118" actId="478"/>
-          <ac:grpSpMkLst>
-            <pc:docMk/>
-            <pc:sldMk cId="2223019525" sldId="259"/>
-            <ac:grpSpMk id="17" creationId="{EED492D1-6283-81FA-79C3-7126601C2545}"/>
-          </ac:grpSpMkLst>
-        </pc:grpChg>
       </pc:sldChg>
       <pc:sldChg chg="delSp modSp mod">
         <pc:chgData name="황경하" userId="89f64ca3-534b-430b-acdd-e699c6ed959a" providerId="ADAL" clId="{2876A8CB-C35D-455B-A256-AB2AE2D4B55A}" dt="2026-03-02T11:44:07.101" v="380" actId="20577"/>
@@ -989,14 +511,6 @@
           <pc:docMk/>
           <pc:sldMk cId="1859529397" sldId="260"/>
         </pc:sldMkLst>
-        <pc:spChg chg="del mod">
-          <ac:chgData name="황경하" userId="89f64ca3-534b-430b-acdd-e699c6ed959a" providerId="ADAL" clId="{2876A8CB-C35D-455B-A256-AB2AE2D4B55A}" dt="2026-03-02T11:01:54.200" v="120" actId="478"/>
-          <ac:spMkLst>
-            <pc:docMk/>
-            <pc:sldMk cId="1859529397" sldId="260"/>
-            <ac:spMk id="12" creationId="{44ECE518-AE1A-4E66-5C4A-36CFF366C654}"/>
-          </ac:spMkLst>
-        </pc:spChg>
         <pc:spChg chg="mod">
           <ac:chgData name="황경하" userId="89f64ca3-534b-430b-acdd-e699c6ed959a" providerId="ADAL" clId="{2876A8CB-C35D-455B-A256-AB2AE2D4B55A}" dt="2026-03-02T10:56:35.957" v="2"/>
           <ac:spMkLst>
@@ -1045,22 +559,6 @@
             <ac:spMk id="18" creationId="{CC65E878-D7B0-FEDB-2C3C-DB274B86E219}"/>
           </ac:spMkLst>
         </pc:spChg>
-        <pc:spChg chg="del mod">
-          <ac:chgData name="황경하" userId="89f64ca3-534b-430b-acdd-e699c6ed959a" providerId="ADAL" clId="{2876A8CB-C35D-455B-A256-AB2AE2D4B55A}" dt="2026-03-02T11:01:54.200" v="120" actId="478"/>
-          <ac:spMkLst>
-            <pc:docMk/>
-            <pc:sldMk cId="1859529397" sldId="260"/>
-            <ac:spMk id="19" creationId="{0225EFE4-5BC0-6D47-5795-3824D74309BC}"/>
-          </ac:spMkLst>
-        </pc:spChg>
-        <pc:spChg chg="del">
-          <ac:chgData name="황경하" userId="89f64ca3-534b-430b-acdd-e699c6ed959a" providerId="ADAL" clId="{2876A8CB-C35D-455B-A256-AB2AE2D4B55A}" dt="2026-03-02T11:01:54.200" v="120" actId="478"/>
-          <ac:spMkLst>
-            <pc:docMk/>
-            <pc:sldMk cId="1859529397" sldId="260"/>
-            <ac:spMk id="20" creationId="{A13B672D-36DB-5387-B870-D0554E263489}"/>
-          </ac:spMkLst>
-        </pc:spChg>
         <pc:spChg chg="mod">
           <ac:chgData name="황경하" userId="89f64ca3-534b-430b-acdd-e699c6ed959a" providerId="ADAL" clId="{2876A8CB-C35D-455B-A256-AB2AE2D4B55A}" dt="2026-03-02T11:43:42.153" v="333" actId="20577"/>
           <ac:spMkLst>
@@ -1085,45 +583,6 @@
             <ac:spMk id="23" creationId="{37050B63-2965-E3A8-EE14-506983DF85C4}"/>
           </ac:spMkLst>
         </pc:spChg>
-        <pc:picChg chg="del">
-          <ac:chgData name="황경하" userId="89f64ca3-534b-430b-acdd-e699c6ed959a" providerId="ADAL" clId="{2876A8CB-C35D-455B-A256-AB2AE2D4B55A}" dt="2026-03-02T11:01:54.200" v="120" actId="478"/>
-          <ac:picMkLst>
-            <pc:docMk/>
-            <pc:sldMk cId="1859529397" sldId="260"/>
-            <ac:picMk id="9" creationId="{1AAA0553-4DDD-0E89-E29C-C5BB91142F40}"/>
-          </ac:picMkLst>
-        </pc:picChg>
-        <pc:picChg chg="del">
-          <ac:chgData name="황경하" userId="89f64ca3-534b-430b-acdd-e699c6ed959a" providerId="ADAL" clId="{2876A8CB-C35D-455B-A256-AB2AE2D4B55A}" dt="2026-03-02T11:01:54.200" v="120" actId="478"/>
-          <ac:picMkLst>
-            <pc:docMk/>
-            <pc:sldMk cId="1859529397" sldId="260"/>
-            <ac:picMk id="10" creationId="{DFE6F04E-A114-20B5-9949-82D1634E821F}"/>
-          </ac:picMkLst>
-        </pc:picChg>
-        <pc:picChg chg="del">
-          <ac:chgData name="황경하" userId="89f64ca3-534b-430b-acdd-e699c6ed959a" providerId="ADAL" clId="{2876A8CB-C35D-455B-A256-AB2AE2D4B55A}" dt="2026-03-02T11:01:54.200" v="120" actId="478"/>
-          <ac:picMkLst>
-            <pc:docMk/>
-            <pc:sldMk cId="1859529397" sldId="260"/>
-            <ac:picMk id="11" creationId="{F5EC053C-B576-8CF1-4ECF-25A1F7F77034}"/>
-          </ac:picMkLst>
-        </pc:picChg>
-      </pc:sldChg>
-      <pc:sldChg chg="modSp del modNotes">
-        <pc:chgData name="황경하" userId="89f64ca3-534b-430b-acdd-e699c6ed959a" providerId="ADAL" clId="{2876A8CB-C35D-455B-A256-AB2AE2D4B55A}" dt="2026-03-02T11:03:23.918" v="146" actId="47"/>
-        <pc:sldMkLst>
-          <pc:docMk/>
-          <pc:sldMk cId="3458721372" sldId="261"/>
-        </pc:sldMkLst>
-        <pc:picChg chg="mod">
-          <ac:chgData name="황경하" userId="89f64ca3-534b-430b-acdd-e699c6ed959a" providerId="ADAL" clId="{2876A8CB-C35D-455B-A256-AB2AE2D4B55A}" dt="2026-03-02T10:56:35.957" v="2"/>
-          <ac:picMkLst>
-            <pc:docMk/>
-            <pc:sldMk cId="3458721372" sldId="261"/>
-            <ac:picMk id="3" creationId="{645EE3CE-032D-0296-A1BE-225A73D4E468}"/>
-          </ac:picMkLst>
-        </pc:picChg>
       </pc:sldChg>
       <pc:sldChg chg="addSp delSp modSp mod modNotes">
         <pc:chgData name="황경하" userId="89f64ca3-534b-430b-acdd-e699c6ed959a" providerId="ADAL" clId="{2876A8CB-C35D-455B-A256-AB2AE2D4B55A}" dt="2026-03-02T11:40:14.468" v="322" actId="2711"/>
@@ -1131,78 +590,6 @@
           <pc:docMk/>
           <pc:sldMk cId="1501519675" sldId="262"/>
         </pc:sldMkLst>
-        <pc:spChg chg="add del mod">
-          <ac:chgData name="황경하" userId="89f64ca3-534b-430b-acdd-e699c6ed959a" providerId="ADAL" clId="{2876A8CB-C35D-455B-A256-AB2AE2D4B55A}" dt="2026-03-02T11:38:08.006" v="311" actId="478"/>
-          <ac:spMkLst>
-            <pc:docMk/>
-            <pc:sldMk cId="1501519675" sldId="262"/>
-            <ac:spMk id="6" creationId="{450264FD-B709-C631-F38E-0B4E8BDD986F}"/>
-          </ac:spMkLst>
-        </pc:spChg>
-        <pc:spChg chg="add del mod">
-          <ac:chgData name="황경하" userId="89f64ca3-534b-430b-acdd-e699c6ed959a" providerId="ADAL" clId="{2876A8CB-C35D-455B-A256-AB2AE2D4B55A}" dt="2026-03-02T11:38:08.006" v="311" actId="478"/>
-          <ac:spMkLst>
-            <pc:docMk/>
-            <pc:sldMk cId="1501519675" sldId="262"/>
-            <ac:spMk id="7" creationId="{0E35FAC4-5B6B-FA50-C277-1FC7C23B63E3}"/>
-          </ac:spMkLst>
-        </pc:spChg>
-        <pc:spChg chg="add del mod">
-          <ac:chgData name="황경하" userId="89f64ca3-534b-430b-acdd-e699c6ed959a" providerId="ADAL" clId="{2876A8CB-C35D-455B-A256-AB2AE2D4B55A}" dt="2026-03-02T11:38:08.006" v="311" actId="478"/>
-          <ac:spMkLst>
-            <pc:docMk/>
-            <pc:sldMk cId="1501519675" sldId="262"/>
-            <ac:spMk id="8" creationId="{0B0D4777-0A05-073D-ECD6-324DD8CACE34}"/>
-          </ac:spMkLst>
-        </pc:spChg>
-        <pc:spChg chg="add del mod">
-          <ac:chgData name="황경하" userId="89f64ca3-534b-430b-acdd-e699c6ed959a" providerId="ADAL" clId="{2876A8CB-C35D-455B-A256-AB2AE2D4B55A}" dt="2026-03-02T11:38:08.006" v="311" actId="478"/>
-          <ac:spMkLst>
-            <pc:docMk/>
-            <pc:sldMk cId="1501519675" sldId="262"/>
-            <ac:spMk id="9" creationId="{9885BAFA-1FB3-6A6E-9C90-3280C0FB6CBE}"/>
-          </ac:spMkLst>
-        </pc:spChg>
-        <pc:spChg chg="add del mod">
-          <ac:chgData name="황경하" userId="89f64ca3-534b-430b-acdd-e699c6ed959a" providerId="ADAL" clId="{2876A8CB-C35D-455B-A256-AB2AE2D4B55A}" dt="2026-03-02T11:38:08.006" v="311" actId="478"/>
-          <ac:spMkLst>
-            <pc:docMk/>
-            <pc:sldMk cId="1501519675" sldId="262"/>
-            <ac:spMk id="10" creationId="{5D7D1EB2-5D9F-7B51-01D0-DF9277389A73}"/>
-          </ac:spMkLst>
-        </pc:spChg>
-        <pc:spChg chg="add del mod">
-          <ac:chgData name="황경하" userId="89f64ca3-534b-430b-acdd-e699c6ed959a" providerId="ADAL" clId="{2876A8CB-C35D-455B-A256-AB2AE2D4B55A}" dt="2026-03-02T11:38:08.006" v="311" actId="478"/>
-          <ac:spMkLst>
-            <pc:docMk/>
-            <pc:sldMk cId="1501519675" sldId="262"/>
-            <ac:spMk id="11" creationId="{3511F9A7-FAF6-6DFD-98B8-87C3C17C0407}"/>
-          </ac:spMkLst>
-        </pc:spChg>
-        <pc:spChg chg="add del mod">
-          <ac:chgData name="황경하" userId="89f64ca3-534b-430b-acdd-e699c6ed959a" providerId="ADAL" clId="{2876A8CB-C35D-455B-A256-AB2AE2D4B55A}" dt="2026-03-02T11:38:08.006" v="311" actId="478"/>
-          <ac:spMkLst>
-            <pc:docMk/>
-            <pc:sldMk cId="1501519675" sldId="262"/>
-            <ac:spMk id="12" creationId="{33A99390-F392-0C1F-58F4-24EE5E5627D4}"/>
-          </ac:spMkLst>
-        </pc:spChg>
-        <pc:spChg chg="add del mod">
-          <ac:chgData name="황경하" userId="89f64ca3-534b-430b-acdd-e699c6ed959a" providerId="ADAL" clId="{2876A8CB-C35D-455B-A256-AB2AE2D4B55A}" dt="2026-03-02T11:38:08.006" v="311" actId="478"/>
-          <ac:spMkLst>
-            <pc:docMk/>
-            <pc:sldMk cId="1501519675" sldId="262"/>
-            <ac:spMk id="13" creationId="{A73761E2-4485-6147-D459-6EF180894C31}"/>
-          </ac:spMkLst>
-        </pc:spChg>
-        <pc:spChg chg="add del mod">
-          <ac:chgData name="황경하" userId="89f64ca3-534b-430b-acdd-e699c6ed959a" providerId="ADAL" clId="{2876A8CB-C35D-455B-A256-AB2AE2D4B55A}" dt="2026-03-02T11:38:08.006" v="311" actId="478"/>
-          <ac:spMkLst>
-            <pc:docMk/>
-            <pc:sldMk cId="1501519675" sldId="262"/>
-            <ac:spMk id="14" creationId="{F31C4B88-982A-6DFD-F72B-4F7DA5128E2A}"/>
-          </ac:spMkLst>
-        </pc:spChg>
         <pc:spChg chg="mod">
           <ac:chgData name="황경하" userId="89f64ca3-534b-430b-acdd-e699c6ed959a" providerId="ADAL" clId="{2876A8CB-C35D-455B-A256-AB2AE2D4B55A}" dt="2026-03-02T11:38:22.871" v="312"/>
           <ac:spMkLst>
@@ -1283,43 +670,12 @@
             <ac:grpSpMk id="3" creationId="{EADD8EB0-DBF9-DB36-AF58-ED357374D337}"/>
           </ac:grpSpMkLst>
         </pc:grpChg>
-        <pc:graphicFrameChg chg="add del mod">
-          <ac:chgData name="황경하" userId="89f64ca3-534b-430b-acdd-e699c6ed959a" providerId="ADAL" clId="{2876A8CB-C35D-455B-A256-AB2AE2D4B55A}" dt="2026-03-02T11:38:08.006" v="311" actId="478"/>
-          <ac:graphicFrameMkLst>
-            <pc:docMk/>
-            <pc:sldMk cId="1501519675" sldId="262"/>
-            <ac:graphicFrameMk id="2" creationId="{919D78EE-EFF5-E27D-51AF-4E12EFBE3FCE}"/>
-          </ac:graphicFrameMkLst>
-        </pc:graphicFrameChg>
         <pc:graphicFrameChg chg="mod">
           <ac:chgData name="황경하" userId="89f64ca3-534b-430b-acdd-e699c6ed959a" providerId="ADAL" clId="{2876A8CB-C35D-455B-A256-AB2AE2D4B55A}" dt="2026-03-02T11:40:14.468" v="322" actId="2711"/>
           <ac:graphicFrameMkLst>
             <pc:docMk/>
             <pc:sldMk cId="1501519675" sldId="262"/>
             <ac:graphicFrameMk id="19" creationId="{073DA7A5-EABB-86C6-809A-9E58BD2A450F}"/>
-          </ac:graphicFrameMkLst>
-        </pc:graphicFrameChg>
-        <pc:picChg chg="del mod">
-          <ac:chgData name="황경하" userId="89f64ca3-534b-430b-acdd-e699c6ed959a" providerId="ADAL" clId="{2876A8CB-C35D-455B-A256-AB2AE2D4B55A}" dt="2026-03-02T11:36:57.783" v="305" actId="478"/>
-          <ac:picMkLst>
-            <pc:docMk/>
-            <pc:sldMk cId="1501519675" sldId="262"/>
-            <ac:picMk id="3" creationId="{78588740-5927-ADD8-E5ED-62F67F36F416}"/>
-          </ac:picMkLst>
-        </pc:picChg>
-      </pc:sldChg>
-      <pc:sldChg chg="delSp modSp del mod">
-        <pc:chgData name="황경하" userId="89f64ca3-534b-430b-acdd-e699c6ed959a" providerId="ADAL" clId="{2876A8CB-C35D-455B-A256-AB2AE2D4B55A}" dt="2026-03-02T12:22:58.547" v="389" actId="47"/>
-        <pc:sldMkLst>
-          <pc:docMk/>
-          <pc:sldMk cId="2208156267" sldId="263"/>
-        </pc:sldMkLst>
-        <pc:graphicFrameChg chg="del mod modGraphic">
-          <ac:chgData name="황경하" userId="89f64ca3-534b-430b-acdd-e699c6ed959a" providerId="ADAL" clId="{2876A8CB-C35D-455B-A256-AB2AE2D4B55A}" dt="2026-03-02T12:22:56.100" v="388" actId="478"/>
-          <ac:graphicFrameMkLst>
-            <pc:docMk/>
-            <pc:sldMk cId="2208156267" sldId="263"/>
-            <ac:graphicFrameMk id="2" creationId="{D4A5E9F7-37EA-5656-626E-AB0F8B19093A}"/>
           </ac:graphicFrameMkLst>
         </pc:graphicFrameChg>
       </pc:sldChg>
@@ -1577,35 +933,12 @@
           </ac:picMkLst>
         </pc:picChg>
       </pc:sldChg>
-      <pc:sldChg chg="del">
-        <pc:chgData name="황경하" userId="89f64ca3-534b-430b-acdd-e699c6ed959a" providerId="ADAL" clId="{2876A8CB-C35D-455B-A256-AB2AE2D4B55A}" dt="2026-03-02T10:56:10.720" v="1" actId="47"/>
-        <pc:sldMkLst>
-          <pc:docMk/>
-          <pc:sldMk cId="2612463847" sldId="266"/>
-        </pc:sldMkLst>
-      </pc:sldChg>
       <pc:sldChg chg="addSp delSp modSp new mod">
         <pc:chgData name="황경하" userId="89f64ca3-534b-430b-acdd-e699c6ed959a" providerId="ADAL" clId="{2876A8CB-C35D-455B-A256-AB2AE2D4B55A}" dt="2026-03-02T11:06:58.080" v="230" actId="1076"/>
         <pc:sldMkLst>
           <pc:docMk/>
           <pc:sldMk cId="3032154889" sldId="266"/>
         </pc:sldMkLst>
-        <pc:spChg chg="del">
-          <ac:chgData name="황경하" userId="89f64ca3-534b-430b-acdd-e699c6ed959a" providerId="ADAL" clId="{2876A8CB-C35D-455B-A256-AB2AE2D4B55A}" dt="2026-03-02T11:06:48.978" v="226" actId="478"/>
-          <ac:spMkLst>
-            <pc:docMk/>
-            <pc:sldMk cId="3032154889" sldId="266"/>
-            <ac:spMk id="2" creationId="{0494D6CB-947A-4C44-B7A3-83191024B55B}"/>
-          </ac:spMkLst>
-        </pc:spChg>
-        <pc:spChg chg="del">
-          <ac:chgData name="황경하" userId="89f64ca3-534b-430b-acdd-e699c6ed959a" providerId="ADAL" clId="{2876A8CB-C35D-455B-A256-AB2AE2D4B55A}" dt="2026-03-02T11:06:48.978" v="226" actId="478"/>
-          <ac:spMkLst>
-            <pc:docMk/>
-            <pc:sldMk cId="3032154889" sldId="266"/>
-            <ac:spMk id="3" creationId="{93FAE971-0E7A-81C8-1F8C-DB9BF8DE006C}"/>
-          </ac:spMkLst>
-        </pc:spChg>
         <pc:spChg chg="add mod">
           <ac:chgData name="황경하" userId="89f64ca3-534b-430b-acdd-e699c6ed959a" providerId="ADAL" clId="{2876A8CB-C35D-455B-A256-AB2AE2D4B55A}" dt="2026-03-02T11:06:58.080" v="230" actId="1076"/>
           <ac:spMkLst>
@@ -1695,396 +1028,934 @@
           </ac:picMkLst>
         </pc:picChg>
       </pc:sldChg>
-      <pc:sldChg chg="addSp delSp modSp new del mod">
-        <pc:chgData name="황경하" userId="89f64ca3-534b-430b-acdd-e699c6ed959a" providerId="ADAL" clId="{2876A8CB-C35D-455B-A256-AB2AE2D4B55A}" dt="2026-03-02T11:56:06.500" v="387" actId="47"/>
+      <pc:sldChg chg="addSp delSp modSp new mod">
+        <pc:chgData name="황경하" userId="89f64ca3-534b-430b-acdd-e699c6ed959a" providerId="ADAL" clId="{2876A8CB-C35D-455B-A256-AB2AE2D4B55A}" dt="2026-03-05T09:57:06.429" v="525" actId="14100"/>
         <pc:sldMkLst>
           <pc:docMk/>
-          <pc:sldMk cId="2579247021" sldId="267"/>
+          <pc:sldMk cId="2442288798" sldId="267"/>
         </pc:sldMkLst>
         <pc:spChg chg="del">
-          <ac:chgData name="황경하" userId="89f64ca3-534b-430b-acdd-e699c6ed959a" providerId="ADAL" clId="{2876A8CB-C35D-455B-A256-AB2AE2D4B55A}" dt="2026-03-02T11:07:39.738" v="232" actId="478"/>
+          <ac:chgData name="황경하" userId="89f64ca3-534b-430b-acdd-e699c6ed959a" providerId="ADAL" clId="{2876A8CB-C35D-455B-A256-AB2AE2D4B55A}" dt="2026-03-05T08:37:32.515" v="391" actId="478"/>
           <ac:spMkLst>
             <pc:docMk/>
-            <pc:sldMk cId="2579247021" sldId="267"/>
-            <ac:spMk id="2" creationId="{EDB22F1F-138B-8F86-BA32-6D6E9CD9F324}"/>
+            <pc:sldMk cId="2442288798" sldId="267"/>
+            <ac:spMk id="2" creationId="{438C47B6-D4C7-DD73-7A2E-CE249FF72163}"/>
           </ac:spMkLst>
         </pc:spChg>
         <pc:spChg chg="del">
-          <ac:chgData name="황경하" userId="89f64ca3-534b-430b-acdd-e699c6ed959a" providerId="ADAL" clId="{2876A8CB-C35D-455B-A256-AB2AE2D4B55A}" dt="2026-03-02T11:07:39.738" v="232" actId="478"/>
+          <ac:chgData name="황경하" userId="89f64ca3-534b-430b-acdd-e699c6ed959a" providerId="ADAL" clId="{2876A8CB-C35D-455B-A256-AB2AE2D4B55A}" dt="2026-03-05T08:37:32.515" v="391" actId="478"/>
           <ac:spMkLst>
             <pc:docMk/>
-            <pc:sldMk cId="2579247021" sldId="267"/>
-            <ac:spMk id="3" creationId="{62E8B6B2-21CA-BF06-B955-5F0C90423BE5}"/>
+            <pc:sldMk cId="2442288798" sldId="267"/>
+            <ac:spMk id="3" creationId="{73CA30CB-EE89-385B-0F9A-A0A3AEB57574}"/>
           </ac:spMkLst>
         </pc:spChg>
-        <pc:picChg chg="add del mod">
-          <ac:chgData name="황경하" userId="89f64ca3-534b-430b-acdd-e699c6ed959a" providerId="ADAL" clId="{2876A8CB-C35D-455B-A256-AB2AE2D4B55A}" dt="2026-03-02T11:07:47.958" v="239" actId="478"/>
+        <pc:spChg chg="add del mod">
+          <ac:chgData name="황경하" userId="89f64ca3-534b-430b-acdd-e699c6ed959a" providerId="ADAL" clId="{2876A8CB-C35D-455B-A256-AB2AE2D4B55A}" dt="2026-03-05T08:38:01.466" v="394" actId="478"/>
+          <ac:spMkLst>
+            <pc:docMk/>
+            <pc:sldMk cId="2442288798" sldId="267"/>
+            <ac:spMk id="10" creationId="{97AB1E6D-A2C5-9151-E87E-43A83E10191C}"/>
+          </ac:spMkLst>
+        </pc:spChg>
+        <pc:spChg chg="add del mod">
+          <ac:chgData name="황경하" userId="89f64ca3-534b-430b-acdd-e699c6ed959a" providerId="ADAL" clId="{2876A8CB-C35D-455B-A256-AB2AE2D4B55A}" dt="2026-03-05T08:38:01.466" v="394" actId="478"/>
+          <ac:spMkLst>
+            <pc:docMk/>
+            <pc:sldMk cId="2442288798" sldId="267"/>
+            <ac:spMk id="11" creationId="{22A184AF-3595-060E-422B-3DD8379320DE}"/>
+          </ac:spMkLst>
+        </pc:spChg>
+        <pc:spChg chg="add del mod">
+          <ac:chgData name="황경하" userId="89f64ca3-534b-430b-acdd-e699c6ed959a" providerId="ADAL" clId="{2876A8CB-C35D-455B-A256-AB2AE2D4B55A}" dt="2026-03-05T08:38:01.466" v="394" actId="478"/>
+          <ac:spMkLst>
+            <pc:docMk/>
+            <pc:sldMk cId="2442288798" sldId="267"/>
+            <ac:spMk id="12" creationId="{329109FD-BCD5-245E-425F-B1BAF2065FD0}"/>
+          </ac:spMkLst>
+        </pc:spChg>
+        <pc:spChg chg="add del mod">
+          <ac:chgData name="황경하" userId="89f64ca3-534b-430b-acdd-e699c6ed959a" providerId="ADAL" clId="{2876A8CB-C35D-455B-A256-AB2AE2D4B55A}" dt="2026-03-05T08:38:01.466" v="394" actId="478"/>
+          <ac:spMkLst>
+            <pc:docMk/>
+            <pc:sldMk cId="2442288798" sldId="267"/>
+            <ac:spMk id="13" creationId="{ED3EF87C-0906-CAB2-99ED-D58CE0DDD438}"/>
+          </ac:spMkLst>
+        </pc:spChg>
+        <pc:spChg chg="add del mod">
+          <ac:chgData name="황경하" userId="89f64ca3-534b-430b-acdd-e699c6ed959a" providerId="ADAL" clId="{2876A8CB-C35D-455B-A256-AB2AE2D4B55A}" dt="2026-03-05T08:38:01.466" v="394" actId="478"/>
+          <ac:spMkLst>
+            <pc:docMk/>
+            <pc:sldMk cId="2442288798" sldId="267"/>
+            <ac:spMk id="14" creationId="{1225061B-E2AD-68EA-4D4B-375FA76CE6AB}"/>
+          </ac:spMkLst>
+        </pc:spChg>
+        <pc:spChg chg="add del mod">
+          <ac:chgData name="황경하" userId="89f64ca3-534b-430b-acdd-e699c6ed959a" providerId="ADAL" clId="{2876A8CB-C35D-455B-A256-AB2AE2D4B55A}" dt="2026-03-05T08:38:01.466" v="394" actId="478"/>
+          <ac:spMkLst>
+            <pc:docMk/>
+            <pc:sldMk cId="2442288798" sldId="267"/>
+            <ac:spMk id="15" creationId="{BC6E15CC-0442-FFAF-193E-E5FC91DDACE6}"/>
+          </ac:spMkLst>
+        </pc:spChg>
+        <pc:spChg chg="add del mod">
+          <ac:chgData name="황경하" userId="89f64ca3-534b-430b-acdd-e699c6ed959a" providerId="ADAL" clId="{2876A8CB-C35D-455B-A256-AB2AE2D4B55A}" dt="2026-03-05T08:37:35.137" v="393" actId="478"/>
+          <ac:spMkLst>
+            <pc:docMk/>
+            <pc:sldMk cId="2442288798" sldId="267"/>
+            <ac:spMk id="16" creationId="{7041E06A-E5D4-5782-EBB8-A28F54A6C67A}"/>
+          </ac:spMkLst>
+        </pc:spChg>
+        <pc:spChg chg="add del mod">
+          <ac:chgData name="황경하" userId="89f64ca3-534b-430b-acdd-e699c6ed959a" providerId="ADAL" clId="{2876A8CB-C35D-455B-A256-AB2AE2D4B55A}" dt="2026-03-05T08:37:35.137" v="393" actId="478"/>
+          <ac:spMkLst>
+            <pc:docMk/>
+            <pc:sldMk cId="2442288798" sldId="267"/>
+            <ac:spMk id="17" creationId="{92C8D6FA-DB7E-47AE-5E16-10FEE873CDF1}"/>
+          </ac:spMkLst>
+        </pc:spChg>
+        <pc:spChg chg="add del mod">
+          <ac:chgData name="황경하" userId="89f64ca3-534b-430b-acdd-e699c6ed959a" providerId="ADAL" clId="{2876A8CB-C35D-455B-A256-AB2AE2D4B55A}" dt="2026-03-05T08:37:35.137" v="393" actId="478"/>
+          <ac:spMkLst>
+            <pc:docMk/>
+            <pc:sldMk cId="2442288798" sldId="267"/>
+            <ac:spMk id="18" creationId="{5FFF07C8-359E-54FF-8529-BC1FF4AF2F09}"/>
+          </ac:spMkLst>
+        </pc:spChg>
+        <pc:spChg chg="add del mod">
+          <ac:chgData name="황경하" userId="89f64ca3-534b-430b-acdd-e699c6ed959a" providerId="ADAL" clId="{2876A8CB-C35D-455B-A256-AB2AE2D4B55A}" dt="2026-03-05T09:54:34.974" v="510" actId="478"/>
+          <ac:spMkLst>
+            <pc:docMk/>
+            <pc:sldMk cId="2442288798" sldId="267"/>
+            <ac:spMk id="20" creationId="{C487D68D-2E7C-B2A3-835E-EF8C535B72CD}"/>
+          </ac:spMkLst>
+        </pc:spChg>
+        <pc:spChg chg="mod topLvl">
+          <ac:chgData name="황경하" userId="89f64ca3-534b-430b-acdd-e699c6ed959a" providerId="ADAL" clId="{2876A8CB-C35D-455B-A256-AB2AE2D4B55A}" dt="2026-03-05T09:56:52.035" v="517" actId="164"/>
+          <ac:spMkLst>
+            <pc:docMk/>
+            <pc:sldMk cId="2442288798" sldId="267"/>
+            <ac:spMk id="23" creationId="{523509C2-15E8-00DE-2EA9-90168293EAAE}"/>
+          </ac:spMkLst>
+        </pc:spChg>
+        <pc:spChg chg="mod topLvl">
+          <ac:chgData name="황경하" userId="89f64ca3-534b-430b-acdd-e699c6ed959a" providerId="ADAL" clId="{2876A8CB-C35D-455B-A256-AB2AE2D4B55A}" dt="2026-03-05T09:56:52.035" v="517" actId="164"/>
+          <ac:spMkLst>
+            <pc:docMk/>
+            <pc:sldMk cId="2442288798" sldId="267"/>
+            <ac:spMk id="26" creationId="{A7DEF4F2-E780-B139-CECD-7A1FEE6D51A4}"/>
+          </ac:spMkLst>
+        </pc:spChg>
+        <pc:spChg chg="add del mod">
+          <ac:chgData name="황경하" userId="89f64ca3-534b-430b-acdd-e699c6ed959a" providerId="ADAL" clId="{2876A8CB-C35D-455B-A256-AB2AE2D4B55A}" dt="2026-03-05T09:54:34.974" v="510" actId="478"/>
+          <ac:spMkLst>
+            <pc:docMk/>
+            <pc:sldMk cId="2442288798" sldId="267"/>
+            <ac:spMk id="30" creationId="{70AA958D-4CCD-FFC4-24A0-881004E0EBD3}"/>
+          </ac:spMkLst>
+        </pc:spChg>
+        <pc:spChg chg="add mod">
+          <ac:chgData name="황경하" userId="89f64ca3-534b-430b-acdd-e699c6ed959a" providerId="ADAL" clId="{2876A8CB-C35D-455B-A256-AB2AE2D4B55A}" dt="2026-03-05T09:56:52.035" v="517" actId="164"/>
+          <ac:spMkLst>
+            <pc:docMk/>
+            <pc:sldMk cId="2442288798" sldId="267"/>
+            <ac:spMk id="31" creationId="{ABB65009-831A-34E6-7C3F-1BB058E37D8F}"/>
+          </ac:spMkLst>
+        </pc:spChg>
+        <pc:spChg chg="add mod">
+          <ac:chgData name="황경하" userId="89f64ca3-534b-430b-acdd-e699c6ed959a" providerId="ADAL" clId="{2876A8CB-C35D-455B-A256-AB2AE2D4B55A}" dt="2026-03-05T09:56:52.035" v="517" actId="164"/>
+          <ac:spMkLst>
+            <pc:docMk/>
+            <pc:sldMk cId="2442288798" sldId="267"/>
+            <ac:spMk id="32" creationId="{CE8C5E8A-DD4A-E30A-4B10-2B71A422E86A}"/>
+          </ac:spMkLst>
+        </pc:spChg>
+        <pc:spChg chg="add del mod">
+          <ac:chgData name="황경하" userId="89f64ca3-534b-430b-acdd-e699c6ed959a" providerId="ADAL" clId="{2876A8CB-C35D-455B-A256-AB2AE2D4B55A}" dt="2026-03-05T08:38:05.839" v="396" actId="478"/>
+          <ac:spMkLst>
+            <pc:docMk/>
+            <pc:sldMk cId="2442288798" sldId="267"/>
+            <ac:spMk id="33" creationId="{54D9251E-1925-9996-683E-6CCA0A95B0E0}"/>
+          </ac:spMkLst>
+        </pc:spChg>
+        <pc:spChg chg="add del mod">
+          <ac:chgData name="황경하" userId="89f64ca3-534b-430b-acdd-e699c6ed959a" providerId="ADAL" clId="{2876A8CB-C35D-455B-A256-AB2AE2D4B55A}" dt="2026-03-05T08:38:05.839" v="396" actId="478"/>
+          <ac:spMkLst>
+            <pc:docMk/>
+            <pc:sldMk cId="2442288798" sldId="267"/>
+            <ac:spMk id="34" creationId="{EAD96C52-9CDA-A321-4BAD-14A9B1A0BD3A}"/>
+          </ac:spMkLst>
+        </pc:spChg>
+        <pc:spChg chg="add del mod">
+          <ac:chgData name="황경하" userId="89f64ca3-534b-430b-acdd-e699c6ed959a" providerId="ADAL" clId="{2876A8CB-C35D-455B-A256-AB2AE2D4B55A}" dt="2026-03-05T08:38:05.839" v="396" actId="478"/>
+          <ac:spMkLst>
+            <pc:docMk/>
+            <pc:sldMk cId="2442288798" sldId="267"/>
+            <ac:spMk id="35" creationId="{9EFE0FD6-32D5-3218-4C02-0E1D2B0867AA}"/>
+          </ac:spMkLst>
+        </pc:spChg>
+        <pc:spChg chg="add mod">
+          <ac:chgData name="황경하" userId="89f64ca3-534b-430b-acdd-e699c6ed959a" providerId="ADAL" clId="{2876A8CB-C35D-455B-A256-AB2AE2D4B55A}" dt="2026-03-05T08:51:45.451" v="401" actId="571"/>
+          <ac:spMkLst>
+            <pc:docMk/>
+            <pc:sldMk cId="2442288798" sldId="267"/>
+            <ac:spMk id="37" creationId="{E6903B64-A9A0-39B9-F3C3-1DE11838D80B}"/>
+          </ac:spMkLst>
+        </pc:spChg>
+        <pc:spChg chg="add del mod">
+          <ac:chgData name="황경하" userId="89f64ca3-534b-430b-acdd-e699c6ed959a" providerId="ADAL" clId="{2876A8CB-C35D-455B-A256-AB2AE2D4B55A}" dt="2026-03-05T09:54:34.974" v="510" actId="478"/>
+          <ac:spMkLst>
+            <pc:docMk/>
+            <pc:sldMk cId="2442288798" sldId="267"/>
+            <ac:spMk id="38" creationId="{9901D1C7-31DC-19C3-C070-832E597FD98A}"/>
+          </ac:spMkLst>
+        </pc:spChg>
+        <pc:spChg chg="add mod">
+          <ac:chgData name="황경하" userId="89f64ca3-534b-430b-acdd-e699c6ed959a" providerId="ADAL" clId="{2876A8CB-C35D-455B-A256-AB2AE2D4B55A}" dt="2026-03-05T09:56:52.035" v="517" actId="164"/>
+          <ac:spMkLst>
+            <pc:docMk/>
+            <pc:sldMk cId="2442288798" sldId="267"/>
+            <ac:spMk id="39" creationId="{C3D73AFD-A62D-A877-D620-3AA81B4B254C}"/>
+          </ac:spMkLst>
+        </pc:spChg>
+        <pc:spChg chg="add mod">
+          <ac:chgData name="황경하" userId="89f64ca3-534b-430b-acdd-e699c6ed959a" providerId="ADAL" clId="{2876A8CB-C35D-455B-A256-AB2AE2D4B55A}" dt="2026-03-05T09:56:52.035" v="517" actId="164"/>
+          <ac:spMkLst>
+            <pc:docMk/>
+            <pc:sldMk cId="2442288798" sldId="267"/>
+            <ac:spMk id="40" creationId="{238C2890-75BC-F125-C2C4-685A6BED4916}"/>
+          </ac:spMkLst>
+        </pc:spChg>
+        <pc:grpChg chg="mod">
+          <ac:chgData name="황경하" userId="89f64ca3-534b-430b-acdd-e699c6ed959a" providerId="ADAL" clId="{2876A8CB-C35D-455B-A256-AB2AE2D4B55A}" dt="2026-03-05T09:41:00.928" v="508" actId="14100"/>
+          <ac:grpSpMkLst>
+            <pc:docMk/>
+            <pc:sldMk cId="2442288798" sldId="267"/>
+            <ac:grpSpMk id="2" creationId="{74C1CDB1-598C-BA3C-A5BB-1BE46EF409FA}"/>
+          </ac:grpSpMkLst>
+        </pc:grpChg>
+        <pc:grpChg chg="mod">
+          <ac:chgData name="황경하" userId="89f64ca3-534b-430b-acdd-e699c6ed959a" providerId="ADAL" clId="{2876A8CB-C35D-455B-A256-AB2AE2D4B55A}" dt="2026-03-05T09:57:06.429" v="525" actId="14100"/>
+          <ac:grpSpMkLst>
+            <pc:docMk/>
+            <pc:sldMk cId="2442288798" sldId="267"/>
+            <ac:grpSpMk id="3" creationId="{0F4BAF75-33C8-4D95-4BD3-5599E84D4837}"/>
+          </ac:grpSpMkLst>
+        </pc:grpChg>
+        <pc:grpChg chg="del">
+          <ac:chgData name="황경하" userId="89f64ca3-534b-430b-acdd-e699c6ed959a" providerId="ADAL" clId="{2876A8CB-C35D-455B-A256-AB2AE2D4B55A}" dt="2026-03-05T08:52:05.117" v="402" actId="165"/>
+          <ac:grpSpMkLst>
+            <pc:docMk/>
+            <pc:sldMk cId="2442288798" sldId="267"/>
+            <ac:grpSpMk id="21" creationId="{38E01343-B2AC-5285-328F-43B3D166F733}"/>
+          </ac:grpSpMkLst>
+        </pc:grpChg>
+        <pc:grpChg chg="del">
+          <ac:chgData name="황경하" userId="89f64ca3-534b-430b-acdd-e699c6ed959a" providerId="ADAL" clId="{2876A8CB-C35D-455B-A256-AB2AE2D4B55A}" dt="2026-03-05T08:52:05.117" v="402" actId="165"/>
+          <ac:grpSpMkLst>
+            <pc:docMk/>
+            <pc:sldMk cId="2442288798" sldId="267"/>
+            <ac:grpSpMk id="24" creationId="{77164606-328C-9917-1FD6-ECB3041AEB48}"/>
+          </ac:grpSpMkLst>
+        </pc:grpChg>
+        <pc:picChg chg="del">
+          <ac:chgData name="황경하" userId="89f64ca3-534b-430b-acdd-e699c6ed959a" providerId="ADAL" clId="{2876A8CB-C35D-455B-A256-AB2AE2D4B55A}" dt="2026-03-05T08:38:01.466" v="394" actId="478"/>
           <ac:picMkLst>
             <pc:docMk/>
-            <pc:sldMk cId="2579247021" sldId="267"/>
-            <ac:picMk id="5" creationId="{0901760E-1796-48D9-7120-EC94A45A3454}"/>
+            <pc:sldMk cId="2442288798" sldId="267"/>
+            <ac:picMk id="5" creationId="{FE676603-D347-ACD7-95CB-FB1F32219D35}"/>
           </ac:picMkLst>
         </pc:picChg>
         <pc:picChg chg="add del mod">
-          <ac:chgData name="황경하" userId="89f64ca3-534b-430b-acdd-e699c6ed959a" providerId="ADAL" clId="{2876A8CB-C35D-455B-A256-AB2AE2D4B55A}" dt="2026-03-02T11:16:24.467" v="267" actId="478"/>
+          <ac:chgData name="황경하" userId="89f64ca3-534b-430b-acdd-e699c6ed959a" providerId="ADAL" clId="{2876A8CB-C35D-455B-A256-AB2AE2D4B55A}" dt="2026-03-05T08:38:01.466" v="394" actId="478"/>
           <ac:picMkLst>
             <pc:docMk/>
-            <pc:sldMk cId="2579247021" sldId="267"/>
-            <ac:picMk id="7" creationId="{DB60A986-7724-BD60-0C82-125CEACFA705}"/>
+            <pc:sldMk cId="2442288798" sldId="267"/>
+            <ac:picMk id="7" creationId="{12FE06BD-C8BD-B0E3-4689-20B20FFA4400}"/>
           </ac:picMkLst>
         </pc:picChg>
-        <pc:picChg chg="add del mod">
-          <ac:chgData name="황경하" userId="89f64ca3-534b-430b-acdd-e699c6ed959a" providerId="ADAL" clId="{2876A8CB-C35D-455B-A256-AB2AE2D4B55A}" dt="2026-03-02T11:13:00.035" v="252" actId="478"/>
+        <pc:picChg chg="del">
+          <ac:chgData name="황경하" userId="89f64ca3-534b-430b-acdd-e699c6ed959a" providerId="ADAL" clId="{2876A8CB-C35D-455B-A256-AB2AE2D4B55A}" dt="2026-03-05T08:38:01.466" v="394" actId="478"/>
           <ac:picMkLst>
             <pc:docMk/>
-            <pc:sldMk cId="2579247021" sldId="267"/>
-            <ac:picMk id="9" creationId="{F18DD4FD-8E91-7772-1976-6C73FB324A11}"/>
+            <pc:sldMk cId="2442288798" sldId="267"/>
+            <ac:picMk id="8" creationId="{9ED3C034-2ED4-11C0-0ED8-A89CE484D05D}"/>
           </ac:picMkLst>
         </pc:picChg>
-        <pc:picChg chg="add del mod">
-          <ac:chgData name="황경하" userId="89f64ca3-534b-430b-acdd-e699c6ed959a" providerId="ADAL" clId="{2876A8CB-C35D-455B-A256-AB2AE2D4B55A}" dt="2026-03-02T11:53:42.958" v="383" actId="21"/>
+        <pc:picChg chg="del">
+          <ac:chgData name="황경하" userId="89f64ca3-534b-430b-acdd-e699c6ed959a" providerId="ADAL" clId="{2876A8CB-C35D-455B-A256-AB2AE2D4B55A}" dt="2026-03-05T08:38:01.466" v="394" actId="478"/>
           <ac:picMkLst>
             <pc:docMk/>
-            <pc:sldMk cId="2579247021" sldId="267"/>
-            <ac:picMk id="11" creationId="{45DE8CC5-9D6E-405C-4DE2-CEC89D9E6FC8}"/>
+            <pc:sldMk cId="2442288798" sldId="267"/>
+            <ac:picMk id="9" creationId="{38D07223-5C8E-1933-6AD5-91DAF72A878B}"/>
           </ac:picMkLst>
         </pc:picChg>
-        <pc:picChg chg="add del mod">
-          <ac:chgData name="황경하" userId="89f64ca3-534b-430b-acdd-e699c6ed959a" providerId="ADAL" clId="{2876A8CB-C35D-455B-A256-AB2AE2D4B55A}" dt="2026-03-02T11:53:42.958" v="383" actId="21"/>
+        <pc:picChg chg="del">
+          <ac:chgData name="황경하" userId="89f64ca3-534b-430b-acdd-e699c6ed959a" providerId="ADAL" clId="{2876A8CB-C35D-455B-A256-AB2AE2D4B55A}" dt="2026-03-05T09:54:34.974" v="510" actId="478"/>
           <ac:picMkLst>
             <pc:docMk/>
-            <pc:sldMk cId="2579247021" sldId="267"/>
-            <ac:picMk id="13" creationId="{1D87C2CA-4919-04A9-D6D8-7E8C1EA62809}"/>
+            <pc:sldMk cId="2442288798" sldId="267"/>
+            <ac:picMk id="19" creationId="{29B445A0-1B62-C537-CFDC-E751705DDC4C}"/>
+          </ac:picMkLst>
+        </pc:picChg>
+        <pc:picChg chg="mod topLvl">
+          <ac:chgData name="황경하" userId="89f64ca3-534b-430b-acdd-e699c6ed959a" providerId="ADAL" clId="{2876A8CB-C35D-455B-A256-AB2AE2D4B55A}" dt="2026-03-05T09:56:52.035" v="517" actId="164"/>
+          <ac:picMkLst>
+            <pc:docMk/>
+            <pc:sldMk cId="2442288798" sldId="267"/>
+            <ac:picMk id="22" creationId="{95141248-DA4B-E628-813B-7B06A5F4087A}"/>
+          </ac:picMkLst>
+        </pc:picChg>
+        <pc:picChg chg="mod topLvl">
+          <ac:chgData name="황경하" userId="89f64ca3-534b-430b-acdd-e699c6ed959a" providerId="ADAL" clId="{2876A8CB-C35D-455B-A256-AB2AE2D4B55A}" dt="2026-03-05T09:56:52.035" v="517" actId="164"/>
+          <ac:picMkLst>
+            <pc:docMk/>
+            <pc:sldMk cId="2442288798" sldId="267"/>
+            <ac:picMk id="25" creationId="{4C345752-C49E-C2AB-187A-4713E970E1E0}"/>
+          </ac:picMkLst>
+        </pc:picChg>
+        <pc:picChg chg="del">
+          <ac:chgData name="황경하" userId="89f64ca3-534b-430b-acdd-e699c6ed959a" providerId="ADAL" clId="{2876A8CB-C35D-455B-A256-AB2AE2D4B55A}" dt="2026-03-05T09:54:34.974" v="510" actId="478"/>
+          <ac:picMkLst>
+            <pc:docMk/>
+            <pc:sldMk cId="2442288798" sldId="267"/>
+            <ac:picMk id="27" creationId="{D0313AAD-F03D-BA0A-2860-CC205C1EF13A}"/>
+          </ac:picMkLst>
+        </pc:picChg>
+        <pc:picChg chg="mod">
+          <ac:chgData name="황경하" userId="89f64ca3-534b-430b-acdd-e699c6ed959a" providerId="ADAL" clId="{2876A8CB-C35D-455B-A256-AB2AE2D4B55A}" dt="2026-03-05T09:56:52.035" v="517" actId="164"/>
+          <ac:picMkLst>
+            <pc:docMk/>
+            <pc:sldMk cId="2442288798" sldId="267"/>
+            <ac:picMk id="28" creationId="{D67DF31E-7A89-971C-26C2-6B2786FBE3B9}"/>
+          </ac:picMkLst>
+        </pc:picChg>
+        <pc:picChg chg="mod">
+          <ac:chgData name="황경하" userId="89f64ca3-534b-430b-acdd-e699c6ed959a" providerId="ADAL" clId="{2876A8CB-C35D-455B-A256-AB2AE2D4B55A}" dt="2026-03-05T09:56:52.035" v="517" actId="164"/>
+          <ac:picMkLst>
+            <pc:docMk/>
+            <pc:sldMk cId="2442288798" sldId="267"/>
+            <ac:picMk id="29" creationId="{62DF187A-7458-CBA2-1148-7278F118E7C0}"/>
           </ac:picMkLst>
         </pc:picChg>
         <pc:picChg chg="add mod">
-          <ac:chgData name="황경하" userId="89f64ca3-534b-430b-acdd-e699c6ed959a" providerId="ADAL" clId="{2876A8CB-C35D-455B-A256-AB2AE2D4B55A}" dt="2026-03-02T11:53:47.168" v="386" actId="1076"/>
+          <ac:chgData name="황경하" userId="89f64ca3-534b-430b-acdd-e699c6ed959a" providerId="ADAL" clId="{2876A8CB-C35D-455B-A256-AB2AE2D4B55A}" dt="2026-03-05T08:51:45.451" v="401" actId="571"/>
           <ac:picMkLst>
             <pc:docMk/>
-            <pc:sldMk cId="2579247021" sldId="267"/>
-            <ac:picMk id="15" creationId="{32D307ED-2C58-77D5-AA14-BFCF3182770D}"/>
+            <pc:sldMk cId="2442288798" sldId="267"/>
+            <ac:picMk id="36" creationId="{0C0EC55E-5D83-2BCB-FFC5-50932EBAC28A}"/>
           </ac:picMkLst>
         </pc:picChg>
       </pc:sldChg>
-      <pc:sldChg chg="addSp delSp modSp new del mod">
-        <pc:chgData name="황경하" userId="89f64ca3-534b-430b-acdd-e699c6ed959a" providerId="ADAL" clId="{2876A8CB-C35D-455B-A256-AB2AE2D4B55A}" dt="2026-03-02T11:56:06.500" v="387" actId="47"/>
-        <pc:sldMkLst>
-          <pc:docMk/>
-          <pc:sldMk cId="2791567267" sldId="268"/>
-        </pc:sldMkLst>
-        <pc:spChg chg="del">
-          <ac:chgData name="황경하" userId="89f64ca3-534b-430b-acdd-e699c6ed959a" providerId="ADAL" clId="{2876A8CB-C35D-455B-A256-AB2AE2D4B55A}" dt="2026-03-02T11:53:40.536" v="382" actId="478"/>
-          <ac:spMkLst>
-            <pc:docMk/>
-            <pc:sldMk cId="2791567267" sldId="268"/>
-            <ac:spMk id="2" creationId="{2981DB92-0F2E-A1A7-F115-EB1422AE6F53}"/>
-          </ac:spMkLst>
-        </pc:spChg>
-        <pc:spChg chg="del">
-          <ac:chgData name="황경하" userId="89f64ca3-534b-430b-acdd-e699c6ed959a" providerId="ADAL" clId="{2876A8CB-C35D-455B-A256-AB2AE2D4B55A}" dt="2026-03-02T11:53:40.536" v="382" actId="478"/>
-          <ac:spMkLst>
-            <pc:docMk/>
-            <pc:sldMk cId="2791567267" sldId="268"/>
-            <ac:spMk id="3" creationId="{C0F9FC2B-8725-70EE-CD5D-333B6B47DBDC}"/>
-          </ac:spMkLst>
-        </pc:spChg>
-        <pc:picChg chg="add mod">
-          <ac:chgData name="황경하" userId="89f64ca3-534b-430b-acdd-e699c6ed959a" providerId="ADAL" clId="{2876A8CB-C35D-455B-A256-AB2AE2D4B55A}" dt="2026-03-02T11:53:43.578" v="384"/>
-          <ac:picMkLst>
-            <pc:docMk/>
-            <pc:sldMk cId="2791567267" sldId="268"/>
-            <ac:picMk id="11" creationId="{45DE8CC5-9D6E-405C-4DE2-CEC89D9E6FC8}"/>
-          </ac:picMkLst>
-        </pc:picChg>
-        <pc:picChg chg="add mod">
-          <ac:chgData name="황경하" userId="89f64ca3-534b-430b-acdd-e699c6ed959a" providerId="ADAL" clId="{2876A8CB-C35D-455B-A256-AB2AE2D4B55A}" dt="2026-03-02T11:53:43.578" v="384"/>
-          <ac:picMkLst>
-            <pc:docMk/>
-            <pc:sldMk cId="2791567267" sldId="268"/>
-            <ac:picMk id="13" creationId="{1D87C2CA-4919-04A9-D6D8-7E8C1EA62809}"/>
-          </ac:picMkLst>
-        </pc:picChg>
-      </pc:sldChg>
-      <pc:sldMasterChg chg="modSp modSldLayout">
-        <pc:chgData name="황경하" userId="89f64ca3-534b-430b-acdd-e699c6ed959a" providerId="ADAL" clId="{2876A8CB-C35D-455B-A256-AB2AE2D4B55A}" dt="2026-03-02T10:56:35.957" v="2"/>
-        <pc:sldMasterMkLst>
-          <pc:docMk/>
-          <pc:sldMasterMk cId="3172943525" sldId="2147483648"/>
-        </pc:sldMasterMkLst>
-        <pc:spChg chg="mod">
-          <ac:chgData name="황경하" userId="89f64ca3-534b-430b-acdd-e699c6ed959a" providerId="ADAL" clId="{2876A8CB-C35D-455B-A256-AB2AE2D4B55A}" dt="2026-03-02T10:56:35.957" v="2"/>
-          <ac:spMkLst>
-            <pc:docMk/>
-            <pc:sldMasterMk cId="3172943525" sldId="2147483648"/>
-            <ac:spMk id="2" creationId="{8333F123-8398-DCE8-AB78-0884B8A2B0D4}"/>
-          </ac:spMkLst>
-        </pc:spChg>
-        <pc:spChg chg="mod">
-          <ac:chgData name="황경하" userId="89f64ca3-534b-430b-acdd-e699c6ed959a" providerId="ADAL" clId="{2876A8CB-C35D-455B-A256-AB2AE2D4B55A}" dt="2026-03-02T10:56:35.957" v="2"/>
-          <ac:spMkLst>
-            <pc:docMk/>
-            <pc:sldMasterMk cId="3172943525" sldId="2147483648"/>
-            <ac:spMk id="3" creationId="{E1A5D1ED-F10E-CD0E-D83C-934CEDF65738}"/>
-          </ac:spMkLst>
-        </pc:spChg>
-        <pc:spChg chg="mod">
-          <ac:chgData name="황경하" userId="89f64ca3-534b-430b-acdd-e699c6ed959a" providerId="ADAL" clId="{2876A8CB-C35D-455B-A256-AB2AE2D4B55A}" dt="2026-03-02T10:56:35.957" v="2"/>
-          <ac:spMkLst>
-            <pc:docMk/>
-            <pc:sldMasterMk cId="3172943525" sldId="2147483648"/>
-            <ac:spMk id="4" creationId="{F63435A8-93DD-1B58-5967-A4148EA40FCE}"/>
-          </ac:spMkLst>
-        </pc:spChg>
-        <pc:spChg chg="mod">
-          <ac:chgData name="황경하" userId="89f64ca3-534b-430b-acdd-e699c6ed959a" providerId="ADAL" clId="{2876A8CB-C35D-455B-A256-AB2AE2D4B55A}" dt="2026-03-02T10:56:35.957" v="2"/>
-          <ac:spMkLst>
-            <pc:docMk/>
-            <pc:sldMasterMk cId="3172943525" sldId="2147483648"/>
-            <ac:spMk id="5" creationId="{630DED69-4DED-7E3A-9AEC-E5B0DB3BF69C}"/>
-          </ac:spMkLst>
-        </pc:spChg>
-        <pc:spChg chg="mod">
-          <ac:chgData name="황경하" userId="89f64ca3-534b-430b-acdd-e699c6ed959a" providerId="ADAL" clId="{2876A8CB-C35D-455B-A256-AB2AE2D4B55A}" dt="2026-03-02T10:56:35.957" v="2"/>
-          <ac:spMkLst>
-            <pc:docMk/>
-            <pc:sldMasterMk cId="3172943525" sldId="2147483648"/>
-            <ac:spMk id="6" creationId="{7130C04F-DF9C-CA29-0029-D863694A84D5}"/>
-          </ac:spMkLst>
-        </pc:spChg>
-        <pc:sldLayoutChg chg="modSp">
-          <pc:chgData name="황경하" userId="89f64ca3-534b-430b-acdd-e699c6ed959a" providerId="ADAL" clId="{2876A8CB-C35D-455B-A256-AB2AE2D4B55A}" dt="2026-03-02T10:56:35.957" v="2"/>
-          <pc:sldLayoutMkLst>
-            <pc:docMk/>
-            <pc:sldMasterMk cId="3172943525" sldId="2147483648"/>
-            <pc:sldLayoutMk cId="3960039971" sldId="2147483649"/>
-          </pc:sldLayoutMkLst>
-          <pc:spChg chg="mod">
-            <ac:chgData name="황경하" userId="89f64ca3-534b-430b-acdd-e699c6ed959a" providerId="ADAL" clId="{2876A8CB-C35D-455B-A256-AB2AE2D4B55A}" dt="2026-03-02T10:56:35.957" v="2"/>
-            <ac:spMkLst>
-              <pc:docMk/>
-              <pc:sldMasterMk cId="3172943525" sldId="2147483648"/>
-              <pc:sldLayoutMk cId="3960039971" sldId="2147483649"/>
-              <ac:spMk id="2" creationId="{5EA7ED53-DF6E-000B-337E-2726AB65878A}"/>
-            </ac:spMkLst>
-          </pc:spChg>
-          <pc:spChg chg="mod">
-            <ac:chgData name="황경하" userId="89f64ca3-534b-430b-acdd-e699c6ed959a" providerId="ADAL" clId="{2876A8CB-C35D-455B-A256-AB2AE2D4B55A}" dt="2026-03-02T10:56:35.957" v="2"/>
-            <ac:spMkLst>
-              <pc:docMk/>
-              <pc:sldMasterMk cId="3172943525" sldId="2147483648"/>
-              <pc:sldLayoutMk cId="3960039971" sldId="2147483649"/>
-              <ac:spMk id="3" creationId="{D6D52D67-465B-843D-4A37-56C0077C7562}"/>
-            </ac:spMkLst>
-          </pc:spChg>
-        </pc:sldLayoutChg>
-        <pc:sldLayoutChg chg="modSp">
-          <pc:chgData name="황경하" userId="89f64ca3-534b-430b-acdd-e699c6ed959a" providerId="ADAL" clId="{2876A8CB-C35D-455B-A256-AB2AE2D4B55A}" dt="2026-03-02T10:56:35.957" v="2"/>
-          <pc:sldLayoutMkLst>
-            <pc:docMk/>
-            <pc:sldMasterMk cId="3172943525" sldId="2147483648"/>
-            <pc:sldLayoutMk cId="2621352959" sldId="2147483651"/>
-          </pc:sldLayoutMkLst>
-          <pc:spChg chg="mod">
-            <ac:chgData name="황경하" userId="89f64ca3-534b-430b-acdd-e699c6ed959a" providerId="ADAL" clId="{2876A8CB-C35D-455B-A256-AB2AE2D4B55A}" dt="2026-03-02T10:56:35.957" v="2"/>
-            <ac:spMkLst>
-              <pc:docMk/>
-              <pc:sldMasterMk cId="3172943525" sldId="2147483648"/>
-              <pc:sldLayoutMk cId="2621352959" sldId="2147483651"/>
-              <ac:spMk id="2" creationId="{7F4431C6-87E8-4693-6606-EEECC095C5BB}"/>
-            </ac:spMkLst>
-          </pc:spChg>
-          <pc:spChg chg="mod">
-            <ac:chgData name="황경하" userId="89f64ca3-534b-430b-acdd-e699c6ed959a" providerId="ADAL" clId="{2876A8CB-C35D-455B-A256-AB2AE2D4B55A}" dt="2026-03-02T10:56:35.957" v="2"/>
-            <ac:spMkLst>
-              <pc:docMk/>
-              <pc:sldMasterMk cId="3172943525" sldId="2147483648"/>
-              <pc:sldLayoutMk cId="2621352959" sldId="2147483651"/>
-              <ac:spMk id="3" creationId="{0E040561-CEE9-95FC-2CB3-3DD2A1AA204F}"/>
-            </ac:spMkLst>
-          </pc:spChg>
-        </pc:sldLayoutChg>
-        <pc:sldLayoutChg chg="modSp">
-          <pc:chgData name="황경하" userId="89f64ca3-534b-430b-acdd-e699c6ed959a" providerId="ADAL" clId="{2876A8CB-C35D-455B-A256-AB2AE2D4B55A}" dt="2026-03-02T10:56:35.957" v="2"/>
-          <pc:sldLayoutMkLst>
-            <pc:docMk/>
-            <pc:sldMasterMk cId="3172943525" sldId="2147483648"/>
-            <pc:sldLayoutMk cId="1517243219" sldId="2147483652"/>
-          </pc:sldLayoutMkLst>
-          <pc:spChg chg="mod">
-            <ac:chgData name="황경하" userId="89f64ca3-534b-430b-acdd-e699c6ed959a" providerId="ADAL" clId="{2876A8CB-C35D-455B-A256-AB2AE2D4B55A}" dt="2026-03-02T10:56:35.957" v="2"/>
-            <ac:spMkLst>
-              <pc:docMk/>
-              <pc:sldMasterMk cId="3172943525" sldId="2147483648"/>
-              <pc:sldLayoutMk cId="1517243219" sldId="2147483652"/>
-              <ac:spMk id="3" creationId="{4956B330-D5F4-CC32-6213-8BCC20BE474E}"/>
-            </ac:spMkLst>
-          </pc:spChg>
-          <pc:spChg chg="mod">
-            <ac:chgData name="황경하" userId="89f64ca3-534b-430b-acdd-e699c6ed959a" providerId="ADAL" clId="{2876A8CB-C35D-455B-A256-AB2AE2D4B55A}" dt="2026-03-02T10:56:35.957" v="2"/>
-            <ac:spMkLst>
-              <pc:docMk/>
-              <pc:sldMasterMk cId="3172943525" sldId="2147483648"/>
-              <pc:sldLayoutMk cId="1517243219" sldId="2147483652"/>
-              <ac:spMk id="4" creationId="{CC5AB29B-A14D-8AAC-9C86-8BB59CC8CACF}"/>
-            </ac:spMkLst>
-          </pc:spChg>
-        </pc:sldLayoutChg>
-        <pc:sldLayoutChg chg="modSp">
-          <pc:chgData name="황경하" userId="89f64ca3-534b-430b-acdd-e699c6ed959a" providerId="ADAL" clId="{2876A8CB-C35D-455B-A256-AB2AE2D4B55A}" dt="2026-03-02T10:56:35.957" v="2"/>
-          <pc:sldLayoutMkLst>
-            <pc:docMk/>
-            <pc:sldMasterMk cId="3172943525" sldId="2147483648"/>
-            <pc:sldLayoutMk cId="2275004809" sldId="2147483653"/>
-          </pc:sldLayoutMkLst>
-          <pc:spChg chg="mod">
-            <ac:chgData name="황경하" userId="89f64ca3-534b-430b-acdd-e699c6ed959a" providerId="ADAL" clId="{2876A8CB-C35D-455B-A256-AB2AE2D4B55A}" dt="2026-03-02T10:56:35.957" v="2"/>
-            <ac:spMkLst>
-              <pc:docMk/>
-              <pc:sldMasterMk cId="3172943525" sldId="2147483648"/>
-              <pc:sldLayoutMk cId="2275004809" sldId="2147483653"/>
-              <ac:spMk id="2" creationId="{561ED92D-EEF5-F2CF-24A4-833D5249E1F6}"/>
-            </ac:spMkLst>
-          </pc:spChg>
-          <pc:spChg chg="mod">
-            <ac:chgData name="황경하" userId="89f64ca3-534b-430b-acdd-e699c6ed959a" providerId="ADAL" clId="{2876A8CB-C35D-455B-A256-AB2AE2D4B55A}" dt="2026-03-02T10:56:35.957" v="2"/>
-            <ac:spMkLst>
-              <pc:docMk/>
-              <pc:sldMasterMk cId="3172943525" sldId="2147483648"/>
-              <pc:sldLayoutMk cId="2275004809" sldId="2147483653"/>
-              <ac:spMk id="3" creationId="{70499470-24A2-22B8-48FE-D4C7AC1C1532}"/>
-            </ac:spMkLst>
-          </pc:spChg>
-          <pc:spChg chg="mod">
-            <ac:chgData name="황경하" userId="89f64ca3-534b-430b-acdd-e699c6ed959a" providerId="ADAL" clId="{2876A8CB-C35D-455B-A256-AB2AE2D4B55A}" dt="2026-03-02T10:56:35.957" v="2"/>
-            <ac:spMkLst>
-              <pc:docMk/>
-              <pc:sldMasterMk cId="3172943525" sldId="2147483648"/>
-              <pc:sldLayoutMk cId="2275004809" sldId="2147483653"/>
-              <ac:spMk id="4" creationId="{74922258-A513-10C5-C00A-9CF6BECF2D58}"/>
-            </ac:spMkLst>
-          </pc:spChg>
-          <pc:spChg chg="mod">
-            <ac:chgData name="황경하" userId="89f64ca3-534b-430b-acdd-e699c6ed959a" providerId="ADAL" clId="{2876A8CB-C35D-455B-A256-AB2AE2D4B55A}" dt="2026-03-02T10:56:35.957" v="2"/>
-            <ac:spMkLst>
-              <pc:docMk/>
-              <pc:sldMasterMk cId="3172943525" sldId="2147483648"/>
-              <pc:sldLayoutMk cId="2275004809" sldId="2147483653"/>
-              <ac:spMk id="5" creationId="{91FC76DB-80DD-23B4-2F83-C0BE01119967}"/>
-            </ac:spMkLst>
-          </pc:spChg>
-          <pc:spChg chg="mod">
-            <ac:chgData name="황경하" userId="89f64ca3-534b-430b-acdd-e699c6ed959a" providerId="ADAL" clId="{2876A8CB-C35D-455B-A256-AB2AE2D4B55A}" dt="2026-03-02T10:56:35.957" v="2"/>
-            <ac:spMkLst>
-              <pc:docMk/>
-              <pc:sldMasterMk cId="3172943525" sldId="2147483648"/>
-              <pc:sldLayoutMk cId="2275004809" sldId="2147483653"/>
-              <ac:spMk id="6" creationId="{9B7AE9A8-39B2-F005-0A70-DDF7D9A901B7}"/>
-            </ac:spMkLst>
-          </pc:spChg>
-        </pc:sldLayoutChg>
-        <pc:sldLayoutChg chg="modSp">
-          <pc:chgData name="황경하" userId="89f64ca3-534b-430b-acdd-e699c6ed959a" providerId="ADAL" clId="{2876A8CB-C35D-455B-A256-AB2AE2D4B55A}" dt="2026-03-02T10:56:35.957" v="2"/>
-          <pc:sldLayoutMkLst>
-            <pc:docMk/>
-            <pc:sldMasterMk cId="3172943525" sldId="2147483648"/>
-            <pc:sldLayoutMk cId="2741444143" sldId="2147483656"/>
-          </pc:sldLayoutMkLst>
-          <pc:spChg chg="mod">
-            <ac:chgData name="황경하" userId="89f64ca3-534b-430b-acdd-e699c6ed959a" providerId="ADAL" clId="{2876A8CB-C35D-455B-A256-AB2AE2D4B55A}" dt="2026-03-02T10:56:35.957" v="2"/>
-            <ac:spMkLst>
-              <pc:docMk/>
-              <pc:sldMasterMk cId="3172943525" sldId="2147483648"/>
-              <pc:sldLayoutMk cId="2741444143" sldId="2147483656"/>
-              <ac:spMk id="2" creationId="{A73A2C99-2B6B-E62D-3423-C6B9A8546320}"/>
-            </ac:spMkLst>
-          </pc:spChg>
-          <pc:spChg chg="mod">
-            <ac:chgData name="황경하" userId="89f64ca3-534b-430b-acdd-e699c6ed959a" providerId="ADAL" clId="{2876A8CB-C35D-455B-A256-AB2AE2D4B55A}" dt="2026-03-02T10:56:35.957" v="2"/>
-            <ac:spMkLst>
-              <pc:docMk/>
-              <pc:sldMasterMk cId="3172943525" sldId="2147483648"/>
-              <pc:sldLayoutMk cId="2741444143" sldId="2147483656"/>
-              <ac:spMk id="3" creationId="{8A18ACC9-78AD-BA83-CF6F-08DEB8831BE8}"/>
-            </ac:spMkLst>
-          </pc:spChg>
-          <pc:spChg chg="mod">
-            <ac:chgData name="황경하" userId="89f64ca3-534b-430b-acdd-e699c6ed959a" providerId="ADAL" clId="{2876A8CB-C35D-455B-A256-AB2AE2D4B55A}" dt="2026-03-02T10:56:35.957" v="2"/>
-            <ac:spMkLst>
-              <pc:docMk/>
-              <pc:sldMasterMk cId="3172943525" sldId="2147483648"/>
-              <pc:sldLayoutMk cId="2741444143" sldId="2147483656"/>
-              <ac:spMk id="4" creationId="{90D9DDEE-E8A2-12E6-B024-8B092DA09AB2}"/>
-            </ac:spMkLst>
-          </pc:spChg>
-        </pc:sldLayoutChg>
-        <pc:sldLayoutChg chg="modSp">
-          <pc:chgData name="황경하" userId="89f64ca3-534b-430b-acdd-e699c6ed959a" providerId="ADAL" clId="{2876A8CB-C35D-455B-A256-AB2AE2D4B55A}" dt="2026-03-02T10:56:35.957" v="2"/>
-          <pc:sldLayoutMkLst>
-            <pc:docMk/>
-            <pc:sldMasterMk cId="3172943525" sldId="2147483648"/>
-            <pc:sldLayoutMk cId="3223006604" sldId="2147483657"/>
-          </pc:sldLayoutMkLst>
-          <pc:spChg chg="mod">
-            <ac:chgData name="황경하" userId="89f64ca3-534b-430b-acdd-e699c6ed959a" providerId="ADAL" clId="{2876A8CB-C35D-455B-A256-AB2AE2D4B55A}" dt="2026-03-02T10:56:35.957" v="2"/>
-            <ac:spMkLst>
-              <pc:docMk/>
-              <pc:sldMasterMk cId="3172943525" sldId="2147483648"/>
-              <pc:sldLayoutMk cId="3223006604" sldId="2147483657"/>
-              <ac:spMk id="2" creationId="{D3E78AA3-9570-5411-3242-E0B1742A5902}"/>
-            </ac:spMkLst>
-          </pc:spChg>
-          <pc:spChg chg="mod">
-            <ac:chgData name="황경하" userId="89f64ca3-534b-430b-acdd-e699c6ed959a" providerId="ADAL" clId="{2876A8CB-C35D-455B-A256-AB2AE2D4B55A}" dt="2026-03-02T10:56:35.957" v="2"/>
-            <ac:spMkLst>
-              <pc:docMk/>
-              <pc:sldMasterMk cId="3172943525" sldId="2147483648"/>
-              <pc:sldLayoutMk cId="3223006604" sldId="2147483657"/>
-              <ac:spMk id="3" creationId="{37AF153D-DA6C-6EBD-E354-E7839B9A4DDF}"/>
-            </ac:spMkLst>
-          </pc:spChg>
-          <pc:spChg chg="mod">
-            <ac:chgData name="황경하" userId="89f64ca3-534b-430b-acdd-e699c6ed959a" providerId="ADAL" clId="{2876A8CB-C35D-455B-A256-AB2AE2D4B55A}" dt="2026-03-02T10:56:35.957" v="2"/>
-            <ac:spMkLst>
-              <pc:docMk/>
-              <pc:sldMasterMk cId="3172943525" sldId="2147483648"/>
-              <pc:sldLayoutMk cId="3223006604" sldId="2147483657"/>
-              <ac:spMk id="4" creationId="{A6E70AE5-AAD5-5973-F7E2-02F216819030}"/>
-            </ac:spMkLst>
-          </pc:spChg>
-        </pc:sldLayoutChg>
-        <pc:sldLayoutChg chg="modSp">
-          <pc:chgData name="황경하" userId="89f64ca3-534b-430b-acdd-e699c6ed959a" providerId="ADAL" clId="{2876A8CB-C35D-455B-A256-AB2AE2D4B55A}" dt="2026-03-02T10:56:35.957" v="2"/>
-          <pc:sldLayoutMkLst>
-            <pc:docMk/>
-            <pc:sldMasterMk cId="3172943525" sldId="2147483648"/>
-            <pc:sldLayoutMk cId="1240830161" sldId="2147483659"/>
-          </pc:sldLayoutMkLst>
-          <pc:spChg chg="mod">
-            <ac:chgData name="황경하" userId="89f64ca3-534b-430b-acdd-e699c6ed959a" providerId="ADAL" clId="{2876A8CB-C35D-455B-A256-AB2AE2D4B55A}" dt="2026-03-02T10:56:35.957" v="2"/>
-            <ac:spMkLst>
-              <pc:docMk/>
-              <pc:sldMasterMk cId="3172943525" sldId="2147483648"/>
-              <pc:sldLayoutMk cId="1240830161" sldId="2147483659"/>
-              <ac:spMk id="2" creationId="{99267AAD-C2B5-6BA3-F0B0-BB4D3432D259}"/>
-            </ac:spMkLst>
-          </pc:spChg>
-          <pc:spChg chg="mod">
-            <ac:chgData name="황경하" userId="89f64ca3-534b-430b-acdd-e699c6ed959a" providerId="ADAL" clId="{2876A8CB-C35D-455B-A256-AB2AE2D4B55A}" dt="2026-03-02T10:56:35.957" v="2"/>
-            <ac:spMkLst>
-              <pc:docMk/>
-              <pc:sldMasterMk cId="3172943525" sldId="2147483648"/>
-              <pc:sldLayoutMk cId="1240830161" sldId="2147483659"/>
-              <ac:spMk id="3" creationId="{56644468-B208-BAFE-E8EE-2EDD8645F8D7}"/>
-            </ac:spMkLst>
-          </pc:spChg>
-        </pc:sldLayoutChg>
-      </pc:sldMasterChg>
     </pc:docChg>
   </pc:docChgLst>
 </pc:chgInfo>
 </file>
 
 <file path=ppt/charts/chart1.xml><?xml version="1.0" encoding="utf-8"?>
+<c:chartSpace xmlns:c="http://schemas.openxmlformats.org/drawingml/2006/chart" xmlns:a="http://schemas.openxmlformats.org/drawingml/2006/main" xmlns:r="http://schemas.openxmlformats.org/officeDocument/2006/relationships" xmlns:c16r2="http://schemas.microsoft.com/office/drawing/2015/06/chart">
+  <c:date1904 val="0"/>
+  <c:lang val="ko-KR"/>
+  <c:roundedCorners val="0"/>
+  <mc:AlternateContent xmlns:mc="http://schemas.openxmlformats.org/markup-compatibility/2006">
+    <mc:Choice xmlns:c14="http://schemas.microsoft.com/office/drawing/2007/8/2/chart" Requires="c14">
+      <c14:style val="102"/>
+    </mc:Choice>
+    <mc:Fallback>
+      <c:style val="2"/>
+    </mc:Fallback>
+  </mc:AlternateContent>
+  <c:chart>
+    <c:autoTitleDeleted val="1"/>
+    <c:plotArea>
+      <c:layout/>
+      <c:barChart>
+        <c:barDir val="bar"/>
+        <c:grouping val="clustered"/>
+        <c:varyColors val="0"/>
+        <c:ser>
+          <c:idx val="0"/>
+          <c:order val="0"/>
+          <c:tx>
+            <c:strRef>
+              <c:f>Sheet1!$B$1</c:f>
+              <c:strCache>
+                <c:ptCount val="1"/>
+                <c:pt idx="0">
+                  <c:v>Accuracy Gain</c:v>
+                </c:pt>
+              </c:strCache>
+            </c:strRef>
+          </c:tx>
+          <c:spPr>
+            <a:solidFill>
+              <a:srgbClr val="00B050"/>
+            </a:solidFill>
+            <a:ln w="15875">
+              <a:solidFill>
+                <a:schemeClr val="tx1"/>
+              </a:solidFill>
+            </a:ln>
+            <a:effectLst/>
+          </c:spPr>
+          <c:invertIfNegative val="1"/>
+          <c:dLbls>
+            <c:dLbl>
+              <c:idx val="0"/>
+              <c:tx>
+                <c:rich>
+                  <a:bodyPr/>
+                  <a:lstStyle/>
+                  <a:p>
+                    <a:r>
+                      <a:rPr lang="en-US" altLang="ko-KR"/>
+                      <a:t>-1.28</a:t>
+                    </a:r>
+                  </a:p>
+                </c:rich>
+              </c:tx>
+              <c:dLblPos val="outEnd"/>
+              <c:showLegendKey val="0"/>
+              <c:showVal val="1"/>
+              <c:showCatName val="0"/>
+              <c:showSerName val="0"/>
+              <c:showPercent val="0"/>
+              <c:showBubbleSize val="0"/>
+              <c:separator>, </c:separator>
+              <c:extLst>
+                <c:ext xmlns:c15="http://schemas.microsoft.com/office/drawing/2012/chart" uri="{CE6537A1-D6FC-4f65-9D91-7224C49458BB}">
+                  <c15:showDataLabelsRange val="0"/>
+                </c:ext>
+                <c:ext xmlns:c16="http://schemas.microsoft.com/office/drawing/2014/chart" uri="{C3380CC4-5D6E-409C-BE32-E72D297353CC}">
+                  <c16:uniqueId val="{00000000-3AFF-48D6-906E-228F162B0FAE}"/>
+                </c:ext>
+              </c:extLst>
+            </c:dLbl>
+            <c:dLbl>
+              <c:idx val="1"/>
+              <c:tx>
+                <c:rich>
+                  <a:bodyPr/>
+                  <a:lstStyle/>
+                  <a:p>
+                    <a:r>
+                      <a:rPr lang="en-US" altLang="ko-KR"/>
+                      <a:t>+1.03</a:t>
+                    </a:r>
+                  </a:p>
+                </c:rich>
+              </c:tx>
+              <c:dLblPos val="outEnd"/>
+              <c:showLegendKey val="0"/>
+              <c:showVal val="1"/>
+              <c:showCatName val="0"/>
+              <c:showSerName val="0"/>
+              <c:showPercent val="0"/>
+              <c:showBubbleSize val="0"/>
+              <c:separator>, </c:separator>
+              <c:extLst>
+                <c:ext xmlns:c15="http://schemas.microsoft.com/office/drawing/2012/chart" uri="{CE6537A1-D6FC-4f65-9D91-7224C49458BB}">
+                  <c15:showDataLabelsRange val="0"/>
+                </c:ext>
+                <c:ext xmlns:c16="http://schemas.microsoft.com/office/drawing/2014/chart" uri="{C3380CC4-5D6E-409C-BE32-E72D297353CC}">
+                  <c16:uniqueId val="{00000001-3AFF-48D6-906E-228F162B0FAE}"/>
+                </c:ext>
+              </c:extLst>
+            </c:dLbl>
+            <c:dLbl>
+              <c:idx val="2"/>
+              <c:tx>
+                <c:rich>
+                  <a:bodyPr/>
+                  <a:lstStyle/>
+                  <a:p>
+                    <a:r>
+                      <a:rPr lang="en-US" altLang="ko-KR"/>
+                      <a:t>+2.55</a:t>
+                    </a:r>
+                  </a:p>
+                </c:rich>
+              </c:tx>
+              <c:dLblPos val="outEnd"/>
+              <c:showLegendKey val="0"/>
+              <c:showVal val="1"/>
+              <c:showCatName val="0"/>
+              <c:showSerName val="0"/>
+              <c:showPercent val="0"/>
+              <c:showBubbleSize val="0"/>
+              <c:separator>, </c:separator>
+              <c:extLst>
+                <c:ext xmlns:c15="http://schemas.microsoft.com/office/drawing/2012/chart" uri="{CE6537A1-D6FC-4f65-9D91-7224C49458BB}">
+                  <c15:showDataLabelsRange val="0"/>
+                </c:ext>
+                <c:ext xmlns:c16="http://schemas.microsoft.com/office/drawing/2014/chart" uri="{C3380CC4-5D6E-409C-BE32-E72D297353CC}">
+                  <c16:uniqueId val="{00000002-3AFF-48D6-906E-228F162B0FAE}"/>
+                </c:ext>
+              </c:extLst>
+            </c:dLbl>
+            <c:dLbl>
+              <c:idx val="3"/>
+              <c:tx>
+                <c:rich>
+                  <a:bodyPr/>
+                  <a:lstStyle/>
+                  <a:p>
+                    <a:r>
+                      <a:rPr lang="en-US" altLang="ko-KR"/>
+                      <a:t>+3.06</a:t>
+                    </a:r>
+                  </a:p>
+                </c:rich>
+              </c:tx>
+              <c:dLblPos val="outEnd"/>
+              <c:showLegendKey val="0"/>
+              <c:showVal val="1"/>
+              <c:showCatName val="0"/>
+              <c:showSerName val="0"/>
+              <c:showPercent val="0"/>
+              <c:showBubbleSize val="0"/>
+              <c:separator>, </c:separator>
+              <c:extLst>
+                <c:ext xmlns:c15="http://schemas.microsoft.com/office/drawing/2012/chart" uri="{CE6537A1-D6FC-4f65-9D91-7224C49458BB}">
+                  <c15:showDataLabelsRange val="0"/>
+                </c:ext>
+                <c:ext xmlns:c16="http://schemas.microsoft.com/office/drawing/2014/chart" uri="{C3380CC4-5D6E-409C-BE32-E72D297353CC}">
+                  <c16:uniqueId val="{00000003-3AFF-48D6-906E-228F162B0FAE}"/>
+                </c:ext>
+              </c:extLst>
+            </c:dLbl>
+            <c:dLbl>
+              <c:idx val="4"/>
+              <c:tx>
+                <c:rich>
+                  <a:bodyPr/>
+                  <a:lstStyle/>
+                  <a:p>
+                    <a:r>
+                      <a:rPr lang="en-US" altLang="ko-KR"/>
+                      <a:t>+3.80</a:t>
+                    </a:r>
+                  </a:p>
+                </c:rich>
+              </c:tx>
+              <c:dLblPos val="outEnd"/>
+              <c:showLegendKey val="0"/>
+              <c:showVal val="1"/>
+              <c:showCatName val="0"/>
+              <c:showSerName val="0"/>
+              <c:showPercent val="0"/>
+              <c:showBubbleSize val="0"/>
+              <c:separator>, </c:separator>
+              <c:extLst>
+                <c:ext xmlns:c15="http://schemas.microsoft.com/office/drawing/2012/chart" uri="{CE6537A1-D6FC-4f65-9D91-7224C49458BB}">
+                  <c15:showDataLabelsRange val="0"/>
+                </c:ext>
+                <c:ext xmlns:c16="http://schemas.microsoft.com/office/drawing/2014/chart" uri="{C3380CC4-5D6E-409C-BE32-E72D297353CC}">
+                  <c16:uniqueId val="{00000004-3AFF-48D6-906E-228F162B0FAE}"/>
+                </c:ext>
+              </c:extLst>
+            </c:dLbl>
+            <c:dLbl>
+              <c:idx val="5"/>
+              <c:tx>
+                <c:rich>
+                  <a:bodyPr/>
+                  <a:lstStyle/>
+                  <a:p>
+                    <a:r>
+                      <a:rPr lang="en-US" altLang="ko-KR"/>
+                      <a:t>+4.51</a:t>
+                    </a:r>
+                  </a:p>
+                </c:rich>
+              </c:tx>
+              <c:dLblPos val="outEnd"/>
+              <c:showLegendKey val="0"/>
+              <c:showVal val="1"/>
+              <c:showCatName val="0"/>
+              <c:showSerName val="0"/>
+              <c:showPercent val="0"/>
+              <c:showBubbleSize val="0"/>
+              <c:separator>, </c:separator>
+              <c:extLst>
+                <c:ext xmlns:c15="http://schemas.microsoft.com/office/drawing/2012/chart" uri="{CE6537A1-D6FC-4f65-9D91-7224C49458BB}">
+                  <c15:showDataLabelsRange val="0"/>
+                </c:ext>
+                <c:ext xmlns:c16="http://schemas.microsoft.com/office/drawing/2014/chart" uri="{C3380CC4-5D6E-409C-BE32-E72D297353CC}">
+                  <c16:uniqueId val="{00000005-3AFF-48D6-906E-228F162B0FAE}"/>
+                </c:ext>
+              </c:extLst>
+            </c:dLbl>
+            <c:dLbl>
+              <c:idx val="6"/>
+              <c:tx>
+                <c:rich>
+                  <a:bodyPr/>
+                  <a:lstStyle/>
+                  <a:p>
+                    <a:r>
+                      <a:rPr lang="en-US" altLang="ko-KR"/>
+                      <a:t>+4.69</a:t>
+                    </a:r>
+                  </a:p>
+                </c:rich>
+              </c:tx>
+              <c:dLblPos val="outEnd"/>
+              <c:showLegendKey val="0"/>
+              <c:showVal val="1"/>
+              <c:showCatName val="0"/>
+              <c:showSerName val="0"/>
+              <c:showPercent val="0"/>
+              <c:showBubbleSize val="0"/>
+              <c:separator>, </c:separator>
+              <c:extLst>
+                <c:ext xmlns:c15="http://schemas.microsoft.com/office/drawing/2012/chart" uri="{CE6537A1-D6FC-4f65-9D91-7224C49458BB}">
+                  <c15:showDataLabelsRange val="0"/>
+                </c:ext>
+                <c:ext xmlns:c16="http://schemas.microsoft.com/office/drawing/2014/chart" uri="{C3380CC4-5D6E-409C-BE32-E72D297353CC}">
+                  <c16:uniqueId val="{00000006-3AFF-48D6-906E-228F162B0FAE}"/>
+                </c:ext>
+              </c:extLst>
+            </c:dLbl>
+            <c:spPr>
+              <a:noFill/>
+              <a:ln>
+                <a:noFill/>
+              </a:ln>
+              <a:effectLst/>
+            </c:spPr>
+            <c:txPr>
+              <a:bodyPr rot="0" spcFirstLastPara="1" vertOverflow="ellipsis" vert="horz" wrap="square" lIns="38100" tIns="19050" rIns="38100" bIns="19050" anchor="ctr" anchorCtr="1">
+                <a:spAutoFit/>
+              </a:bodyPr>
+              <a:lstStyle/>
+              <a:p>
+                <a:pPr>
+                  <a:defRPr sz="1500" b="0" i="0" u="none" strike="noStrike" kern="1200" baseline="0">
+                    <a:solidFill>
+                      <a:schemeClr val="tx1"/>
+                    </a:solidFill>
+                    <a:latin typeface="Times New Roman" panose="02020603050405020304" pitchFamily="18" charset="0"/>
+                    <a:ea typeface="+mn-ea"/>
+                    <a:cs typeface="Times New Roman" panose="02020603050405020304" pitchFamily="18" charset="0"/>
+                  </a:defRPr>
+                </a:pPr>
+                <a:endParaRPr lang="ko-KR"/>
+              </a:p>
+            </c:txPr>
+            <c:dLblPos val="outEnd"/>
+            <c:showLegendKey val="0"/>
+            <c:showVal val="1"/>
+            <c:showCatName val="0"/>
+            <c:showSerName val="0"/>
+            <c:showPercent val="0"/>
+            <c:showBubbleSize val="0"/>
+            <c:separator>, </c:separator>
+            <c:showLeaderLines val="0"/>
+            <c:extLst>
+              <c:ext xmlns:c15="http://schemas.microsoft.com/office/drawing/2012/chart" uri="{CE6537A1-D6FC-4f65-9D91-7224C49458BB}">
+                <c15:showLeaderLines val="1"/>
+                <c15:leaderLines>
+                  <c:spPr>
+                    <a:ln w="9525" cap="flat" cmpd="sng" algn="ctr">
+                      <a:solidFill>
+                        <a:schemeClr val="tx1">
+                          <a:lumMod val="35000"/>
+                          <a:lumOff val="65000"/>
+                        </a:schemeClr>
+                      </a:solidFill>
+                      <a:round/>
+                    </a:ln>
+                    <a:effectLst/>
+                  </c:spPr>
+                </c15:leaderLines>
+              </c:ext>
+            </c:extLst>
+          </c:dLbls>
+          <c:cat>
+            <c:strRef>
+              <c:f>Sheet1!$A$2:$A$8</c:f>
+              <c:strCache>
+                <c:ptCount val="7"/>
+                <c:pt idx="0">
+                  <c:v>YOLO v8 X</c:v>
+                </c:pt>
+                <c:pt idx="1">
+                  <c:v>YOLO v8 Large</c:v>
+                </c:pt>
+                <c:pt idx="2">
+                  <c:v>YOLO v4</c:v>
+                </c:pt>
+                <c:pt idx="3">
+                  <c:v>YOLO v2</c:v>
+                </c:pt>
+                <c:pt idx="4">
+                  <c:v>YOLO v8 Small</c:v>
+                </c:pt>
+                <c:pt idx="5">
+                  <c:v>YOLO v8 Medium</c:v>
+                </c:pt>
+                <c:pt idx="6">
+                  <c:v>YOLO v5</c:v>
+                </c:pt>
+              </c:strCache>
+            </c:strRef>
+          </c:cat>
+          <c:val>
+            <c:numRef>
+              <c:f>Sheet1!$B$2:$B$8</c:f>
+              <c:numCache>
+                <c:formatCode>General</c:formatCode>
+                <c:ptCount val="7"/>
+                <c:pt idx="0">
+                  <c:v>-1.51</c:v>
+                </c:pt>
+                <c:pt idx="1">
+                  <c:v>0.8</c:v>
+                </c:pt>
+                <c:pt idx="2">
+                  <c:v>2.3199999999999998</c:v>
+                </c:pt>
+                <c:pt idx="3">
+                  <c:v>2.83</c:v>
+                </c:pt>
+                <c:pt idx="4">
+                  <c:v>3.57</c:v>
+                </c:pt>
+                <c:pt idx="5">
+                  <c:v>4.28</c:v>
+                </c:pt>
+                <c:pt idx="6">
+                  <c:v>4.46</c:v>
+                </c:pt>
+              </c:numCache>
+            </c:numRef>
+          </c:val>
+          <c:extLst>
+            <c:ext xmlns:c14="http://schemas.microsoft.com/office/drawing/2007/8/2/chart" uri="{6F2FDCE9-48DA-4B69-8628-5D25D57E5C99}">
+              <c14:invertSolidFillFmt>
+                <c14:spPr xmlns:c14="http://schemas.microsoft.com/office/drawing/2007/8/2/chart">
+                  <a:solidFill>
+                    <a:srgbClr val="FF0000"/>
+                  </a:solidFill>
+                  <a:ln w="15875">
+                    <a:solidFill>
+                      <a:schemeClr val="tx1"/>
+                    </a:solidFill>
+                  </a:ln>
+                  <a:effectLst/>
+                </c14:spPr>
+              </c14:invertSolidFillFmt>
+            </c:ext>
+            <c:ext xmlns:c16="http://schemas.microsoft.com/office/drawing/2014/chart" uri="{C3380CC4-5D6E-409C-BE32-E72D297353CC}">
+              <c16:uniqueId val="{00000007-3AFF-48D6-906E-228F162B0FAE}"/>
+            </c:ext>
+          </c:extLst>
+        </c:ser>
+        <c:dLbls>
+          <c:dLblPos val="outEnd"/>
+          <c:showLegendKey val="0"/>
+          <c:showVal val="1"/>
+          <c:showCatName val="0"/>
+          <c:showSerName val="0"/>
+          <c:showPercent val="0"/>
+          <c:showBubbleSize val="0"/>
+        </c:dLbls>
+        <c:gapWidth val="0"/>
+        <c:overlap val="10"/>
+        <c:axId val="1459402623"/>
+        <c:axId val="1459405503"/>
+      </c:barChart>
+      <c:catAx>
+        <c:axId val="1459402623"/>
+        <c:scaling>
+          <c:orientation val="minMax"/>
+        </c:scaling>
+        <c:delete val="0"/>
+        <c:axPos val="l"/>
+        <c:numFmt formatCode="General" sourceLinked="1"/>
+        <c:majorTickMark val="none"/>
+        <c:minorTickMark val="none"/>
+        <c:tickLblPos val="nextTo"/>
+        <c:spPr>
+          <a:noFill/>
+          <a:ln w="9525" cap="flat" cmpd="sng" algn="ctr">
+            <a:solidFill>
+              <a:schemeClr val="tx1"/>
+            </a:solidFill>
+            <a:round/>
+          </a:ln>
+          <a:effectLst/>
+        </c:spPr>
+        <c:txPr>
+          <a:bodyPr rot="-60000000" spcFirstLastPara="1" vertOverflow="ellipsis" vert="horz" wrap="square" anchor="ctr" anchorCtr="1"/>
+          <a:lstStyle/>
+          <a:p>
+            <a:pPr>
+              <a:defRPr sz="1197" b="0" i="0" u="none" strike="noStrike" kern="1200" baseline="0">
+                <a:noFill/>
+                <a:latin typeface="+mn-lt"/>
+                <a:ea typeface="+mn-ea"/>
+                <a:cs typeface="+mn-cs"/>
+              </a:defRPr>
+            </a:pPr>
+            <a:endParaRPr lang="ko-KR"/>
+          </a:p>
+        </c:txPr>
+        <c:crossAx val="1459405503"/>
+        <c:crosses val="autoZero"/>
+        <c:auto val="1"/>
+        <c:lblAlgn val="ctr"/>
+        <c:lblOffset val="100"/>
+        <c:noMultiLvlLbl val="0"/>
+      </c:catAx>
+      <c:valAx>
+        <c:axId val="1459405503"/>
+        <c:scaling>
+          <c:orientation val="minMax"/>
+          <c:max val="10"/>
+          <c:min val="-10"/>
+        </c:scaling>
+        <c:delete val="0"/>
+        <c:axPos val="b"/>
+        <c:title>
+          <c:tx>
+            <c:rich>
+              <a:bodyPr rot="0" spcFirstLastPara="1" vertOverflow="ellipsis" vert="horz" wrap="square" anchor="ctr" anchorCtr="1"/>
+              <a:lstStyle/>
+              <a:p>
+                <a:pPr>
+                  <a:defRPr sz="1600" b="0" i="0" u="none" strike="noStrike" kern="1200" baseline="0">
+                    <a:solidFill>
+                      <a:schemeClr val="tx1"/>
+                    </a:solidFill>
+                    <a:latin typeface="Times New Roman" panose="02020603050405020304" pitchFamily="18" charset="0"/>
+                    <a:ea typeface="+mn-ea"/>
+                    <a:cs typeface="Times New Roman" panose="02020603050405020304" pitchFamily="18" charset="0"/>
+                  </a:defRPr>
+                </a:pPr>
+                <a:r>
+                  <a:rPr lang="en-US" altLang="ko-KR" sz="1800" b="0" i="0" u="none" strike="noStrike" kern="1200" baseline="0">
+                    <a:solidFill>
+                      <a:schemeClr val="tx1"/>
+                    </a:solidFill>
+                    <a:latin typeface="Times New Roman" panose="02020603050405020304" pitchFamily="18" charset="0"/>
+                    <a:cs typeface="Times New Roman" panose="02020603050405020304" pitchFamily="18" charset="0"/>
+                  </a:rPr>
+                  <a:t> Accuracy relative to Fair Baseline (         )</a:t>
+                </a:r>
+                <a:endParaRPr lang="ko-KR" altLang="en-US" sz="1800" b="0" i="0" u="none" strike="noStrike" kern="1200" baseline="0">
+                  <a:solidFill>
+                    <a:schemeClr val="tx1"/>
+                  </a:solidFill>
+                  <a:latin typeface="Times New Roman" panose="02020603050405020304" pitchFamily="18" charset="0"/>
+                  <a:cs typeface="Times New Roman" panose="02020603050405020304" pitchFamily="18" charset="0"/>
+                </a:endParaRPr>
+              </a:p>
+            </c:rich>
+          </c:tx>
+          <c:overlay val="0"/>
+          <c:spPr>
+            <a:noFill/>
+            <a:ln>
+              <a:noFill/>
+            </a:ln>
+            <a:effectLst/>
+          </c:spPr>
+          <c:txPr>
+            <a:bodyPr rot="0" spcFirstLastPara="1" vertOverflow="ellipsis" vert="horz" wrap="square" anchor="ctr" anchorCtr="1"/>
+            <a:lstStyle/>
+            <a:p>
+              <a:pPr>
+                <a:defRPr sz="1600" b="0" i="0" u="none" strike="noStrike" kern="1200" baseline="0">
+                  <a:solidFill>
+                    <a:schemeClr val="tx1"/>
+                  </a:solidFill>
+                  <a:latin typeface="Times New Roman" panose="02020603050405020304" pitchFamily="18" charset="0"/>
+                  <a:ea typeface="+mn-ea"/>
+                  <a:cs typeface="Times New Roman" panose="02020603050405020304" pitchFamily="18" charset="0"/>
+                </a:defRPr>
+              </a:pPr>
+              <a:endParaRPr lang="ko-KR" altLang="en-US"/>
+            </a:p>
+          </c:txPr>
+        </c:title>
+        <c:numFmt formatCode="0.0;0.0;0.0" sourceLinked="0"/>
+        <c:majorTickMark val="none"/>
+        <c:minorTickMark val="none"/>
+        <c:tickLblPos val="nextTo"/>
+        <c:spPr>
+          <a:noFill/>
+          <a:ln>
+            <a:noFill/>
+          </a:ln>
+          <a:effectLst/>
+        </c:spPr>
+        <c:txPr>
+          <a:bodyPr rot="-60000000" spcFirstLastPara="1" vertOverflow="ellipsis" vert="horz" wrap="square" anchor="ctr" anchorCtr="1"/>
+          <a:lstStyle/>
+          <a:p>
+            <a:pPr>
+              <a:defRPr sz="1197" b="0" i="0" u="none" strike="noStrike" kern="1200" baseline="0">
+                <a:solidFill>
+                  <a:schemeClr val="tx1"/>
+                </a:solidFill>
+                <a:latin typeface="Times New Roman" panose="02020603050405020304" pitchFamily="18" charset="0"/>
+                <a:ea typeface="+mn-ea"/>
+                <a:cs typeface="Times New Roman" panose="02020603050405020304" pitchFamily="18" charset="0"/>
+              </a:defRPr>
+            </a:pPr>
+            <a:endParaRPr lang="ko-KR"/>
+          </a:p>
+        </c:txPr>
+        <c:crossAx val="1459402623"/>
+        <c:crosses val="autoZero"/>
+        <c:crossBetween val="between"/>
+        <c:minorUnit val="0.5"/>
+      </c:valAx>
+      <c:spPr>
+        <a:noFill/>
+        <a:ln>
+          <a:noFill/>
+        </a:ln>
+        <a:effectLst/>
+      </c:spPr>
+    </c:plotArea>
+    <c:plotVisOnly val="1"/>
+    <c:dispBlanksAs val="gap"/>
+    <c:showDLblsOverMax val="0"/>
+    <c:extLst>
+      <c:ext xmlns:c16r3="http://schemas.microsoft.com/office/drawing/2017/03/chart" uri="{56B9EC1D-385E-4148-901F-78D8002777C0}">
+        <c16r3:dataDisplayOptions16>
+          <c16r3:dispNaAsBlank val="1"/>
+        </c16r3:dataDisplayOptions16>
+      </c:ext>
+    </c:extLst>
+  </c:chart>
+  <c:spPr>
+    <a:noFill/>
+    <a:ln>
+      <a:noFill/>
+    </a:ln>
+    <a:effectLst/>
+  </c:spPr>
+  <c:txPr>
+    <a:bodyPr/>
+    <a:lstStyle/>
+    <a:p>
+      <a:pPr>
+        <a:defRPr/>
+      </a:pPr>
+      <a:endParaRPr lang="ko-KR"/>
+    </a:p>
+  </c:txPr>
+  <c:externalData r:id="rId3">
+    <c:autoUpdate val="0"/>
+  </c:externalData>
+</c:chartSpace>
+</file>
+
+<file path=ppt/charts/chart10.xml><?xml version="1.0" encoding="utf-8"?>
 <c:chartSpace xmlns:c="http://schemas.openxmlformats.org/drawingml/2006/chart" xmlns:a="http://schemas.openxmlformats.org/drawingml/2006/main" xmlns:r="http://schemas.openxmlformats.org/officeDocument/2006/relationships" xmlns:c16r2="http://schemas.microsoft.com/office/drawing/2015/06/chart">
   <c:date1904 val="0"/>
   <c:lang val="ko-KR"/>
@@ -2727,7 +2598,552 @@
 </cs:colorStyle>
 </file>
 
+<file path=ppt/charts/colors10.xml><?xml version="1.0" encoding="utf-8"?>
+<cs:colorStyle xmlns:cs="http://schemas.microsoft.com/office/drawing/2012/chartStyle" xmlns:a="http://schemas.openxmlformats.org/drawingml/2006/main" meth="cycle" id="10">
+  <a:schemeClr val="accent1"/>
+  <a:schemeClr val="accent2"/>
+  <a:schemeClr val="accent3"/>
+  <a:schemeClr val="accent4"/>
+  <a:schemeClr val="accent5"/>
+  <a:schemeClr val="accent6"/>
+  <cs:variation/>
+  <cs:variation>
+    <a:lumMod val="60000"/>
+  </cs:variation>
+  <cs:variation>
+    <a:lumMod val="80000"/>
+    <a:lumOff val="20000"/>
+  </cs:variation>
+  <cs:variation>
+    <a:lumMod val="80000"/>
+  </cs:variation>
+  <cs:variation>
+    <a:lumMod val="60000"/>
+    <a:lumOff val="40000"/>
+  </cs:variation>
+  <cs:variation>
+    <a:lumMod val="50000"/>
+  </cs:variation>
+  <cs:variation>
+    <a:lumMod val="70000"/>
+    <a:lumOff val="30000"/>
+  </cs:variation>
+  <cs:variation>
+    <a:lumMod val="70000"/>
+  </cs:variation>
+  <cs:variation>
+    <a:lumMod val="50000"/>
+    <a:lumOff val="50000"/>
+  </cs:variation>
+</cs:colorStyle>
+</file>
+
 <file path=ppt/charts/style1.xml><?xml version="1.0" encoding="utf-8"?>
+<cs:chartStyle xmlns:cs="http://schemas.microsoft.com/office/drawing/2012/chartStyle" xmlns:a="http://schemas.openxmlformats.org/drawingml/2006/main" id="216">
+  <cs:axisTitle>
+    <cs:lnRef idx="0"/>
+    <cs:fillRef idx="0"/>
+    <cs:effectRef idx="0"/>
+    <cs:fontRef idx="minor">
+      <a:schemeClr val="tx1">
+        <a:lumMod val="65000"/>
+        <a:lumOff val="35000"/>
+      </a:schemeClr>
+    </cs:fontRef>
+    <cs:defRPr sz="1330" kern="1200"/>
+  </cs:axisTitle>
+  <cs:categoryAxis>
+    <cs:lnRef idx="0"/>
+    <cs:fillRef idx="0"/>
+    <cs:effectRef idx="0"/>
+    <cs:fontRef idx="minor">
+      <a:schemeClr val="tx1">
+        <a:lumMod val="65000"/>
+        <a:lumOff val="35000"/>
+      </a:schemeClr>
+    </cs:fontRef>
+    <cs:spPr>
+      <a:ln w="9525" cap="flat" cmpd="sng" algn="ctr">
+        <a:solidFill>
+          <a:schemeClr val="tx1">
+            <a:lumMod val="15000"/>
+            <a:lumOff val="85000"/>
+          </a:schemeClr>
+        </a:solidFill>
+        <a:round/>
+      </a:ln>
+    </cs:spPr>
+    <cs:defRPr sz="1197" kern="1200"/>
+  </cs:categoryAxis>
+  <cs:chartArea mods="allowNoFillOverride allowNoLineOverride">
+    <cs:lnRef idx="0"/>
+    <cs:fillRef idx="0"/>
+    <cs:effectRef idx="0"/>
+    <cs:fontRef idx="minor">
+      <a:schemeClr val="tx1"/>
+    </cs:fontRef>
+    <cs:spPr>
+      <a:solidFill>
+        <a:schemeClr val="bg1"/>
+      </a:solidFill>
+      <a:ln w="9525" cap="flat" cmpd="sng" algn="ctr">
+        <a:solidFill>
+          <a:schemeClr val="tx1">
+            <a:lumMod val="15000"/>
+            <a:lumOff val="85000"/>
+          </a:schemeClr>
+        </a:solidFill>
+        <a:round/>
+      </a:ln>
+    </cs:spPr>
+    <cs:defRPr sz="1330" kern="1200"/>
+  </cs:chartArea>
+  <cs:dataLabel>
+    <cs:lnRef idx="0"/>
+    <cs:fillRef idx="0"/>
+    <cs:effectRef idx="0"/>
+    <cs:fontRef idx="minor">
+      <a:schemeClr val="tx1">
+        <a:lumMod val="75000"/>
+        <a:lumOff val="25000"/>
+      </a:schemeClr>
+    </cs:fontRef>
+    <cs:defRPr sz="1197" kern="1200"/>
+  </cs:dataLabel>
+  <cs:dataLabelCallout>
+    <cs:lnRef idx="0"/>
+    <cs:fillRef idx="0"/>
+    <cs:effectRef idx="0"/>
+    <cs:fontRef idx="minor">
+      <a:schemeClr val="dk1">
+        <a:lumMod val="65000"/>
+        <a:lumOff val="35000"/>
+      </a:schemeClr>
+    </cs:fontRef>
+    <cs:spPr>
+      <a:solidFill>
+        <a:schemeClr val="lt1"/>
+      </a:solidFill>
+      <a:ln>
+        <a:solidFill>
+          <a:schemeClr val="dk1">
+            <a:lumMod val="25000"/>
+            <a:lumOff val="75000"/>
+          </a:schemeClr>
+        </a:solidFill>
+      </a:ln>
+    </cs:spPr>
+    <cs:defRPr sz="1197" kern="1200"/>
+    <cs:bodyPr rot="0" spcFirstLastPara="1" vertOverflow="clip" horzOverflow="clip" vert="horz" wrap="square" lIns="36576" tIns="18288" rIns="36576" bIns="18288" anchor="ctr" anchorCtr="1">
+      <a:spAutoFit/>
+    </cs:bodyPr>
+  </cs:dataLabelCallout>
+  <cs:dataPoint>
+    <cs:lnRef idx="0"/>
+    <cs:fillRef idx="1">
+      <cs:styleClr val="auto"/>
+    </cs:fillRef>
+    <cs:effectRef idx="0"/>
+    <cs:fontRef idx="minor">
+      <a:schemeClr val="tx1"/>
+    </cs:fontRef>
+  </cs:dataPoint>
+  <cs:dataPoint3D>
+    <cs:lnRef idx="0"/>
+    <cs:fillRef idx="1">
+      <cs:styleClr val="auto"/>
+    </cs:fillRef>
+    <cs:effectRef idx="0"/>
+    <cs:fontRef idx="minor">
+      <a:schemeClr val="tx1"/>
+    </cs:fontRef>
+  </cs:dataPoint3D>
+  <cs:dataPointLine>
+    <cs:lnRef idx="0">
+      <cs:styleClr val="auto"/>
+    </cs:lnRef>
+    <cs:fillRef idx="1"/>
+    <cs:effectRef idx="0"/>
+    <cs:fontRef idx="minor">
+      <a:schemeClr val="tx1"/>
+    </cs:fontRef>
+    <cs:spPr>
+      <a:ln w="28575" cap="rnd">
+        <a:solidFill>
+          <a:schemeClr val="phClr"/>
+        </a:solidFill>
+        <a:round/>
+      </a:ln>
+    </cs:spPr>
+  </cs:dataPointLine>
+  <cs:dataPointMarker>
+    <cs:lnRef idx="0">
+      <cs:styleClr val="auto"/>
+    </cs:lnRef>
+    <cs:fillRef idx="1">
+      <cs:styleClr val="auto"/>
+    </cs:fillRef>
+    <cs:effectRef idx="0"/>
+    <cs:fontRef idx="minor">
+      <a:schemeClr val="tx1"/>
+    </cs:fontRef>
+    <cs:spPr>
+      <a:ln w="9525">
+        <a:solidFill>
+          <a:schemeClr val="phClr"/>
+        </a:solidFill>
+      </a:ln>
+    </cs:spPr>
+  </cs:dataPointMarker>
+  <cs:dataPointMarkerLayout symbol="circle" size="5"/>
+  <cs:dataPointWireframe>
+    <cs:lnRef idx="0">
+      <cs:styleClr val="auto"/>
+    </cs:lnRef>
+    <cs:fillRef idx="1"/>
+    <cs:effectRef idx="0"/>
+    <cs:fontRef idx="minor">
+      <a:schemeClr val="tx1"/>
+    </cs:fontRef>
+    <cs:spPr>
+      <a:ln w="9525" cap="rnd">
+        <a:solidFill>
+          <a:schemeClr val="phClr"/>
+        </a:solidFill>
+        <a:round/>
+      </a:ln>
+    </cs:spPr>
+  </cs:dataPointWireframe>
+  <cs:dataTable>
+    <cs:lnRef idx="0"/>
+    <cs:fillRef idx="0"/>
+    <cs:effectRef idx="0"/>
+    <cs:fontRef idx="minor">
+      <a:schemeClr val="tx1">
+        <a:lumMod val="65000"/>
+        <a:lumOff val="35000"/>
+      </a:schemeClr>
+    </cs:fontRef>
+    <cs:spPr>
+      <a:noFill/>
+      <a:ln w="9525" cap="flat" cmpd="sng" algn="ctr">
+        <a:solidFill>
+          <a:schemeClr val="tx1">
+            <a:lumMod val="15000"/>
+            <a:lumOff val="85000"/>
+          </a:schemeClr>
+        </a:solidFill>
+        <a:round/>
+      </a:ln>
+    </cs:spPr>
+    <cs:defRPr sz="1197" kern="1200"/>
+  </cs:dataTable>
+  <cs:downBar>
+    <cs:lnRef idx="0"/>
+    <cs:fillRef idx="0"/>
+    <cs:effectRef idx="0"/>
+    <cs:fontRef idx="minor">
+      <a:schemeClr val="tx1"/>
+    </cs:fontRef>
+    <cs:spPr>
+      <a:solidFill>
+        <a:schemeClr val="dk1">
+          <a:lumMod val="75000"/>
+          <a:lumOff val="25000"/>
+        </a:schemeClr>
+      </a:solidFill>
+      <a:ln w="9525" cap="flat" cmpd="sng" algn="ctr">
+        <a:solidFill>
+          <a:schemeClr val="tx1">
+            <a:lumMod val="65000"/>
+            <a:lumOff val="35000"/>
+          </a:schemeClr>
+        </a:solidFill>
+        <a:round/>
+      </a:ln>
+    </cs:spPr>
+  </cs:downBar>
+  <cs:dropLine>
+    <cs:lnRef idx="0"/>
+    <cs:fillRef idx="0"/>
+    <cs:effectRef idx="0"/>
+    <cs:fontRef idx="minor">
+      <a:schemeClr val="tx1"/>
+    </cs:fontRef>
+    <cs:spPr>
+      <a:ln w="9525" cap="flat" cmpd="sng" algn="ctr">
+        <a:solidFill>
+          <a:schemeClr val="tx1">
+            <a:lumMod val="35000"/>
+            <a:lumOff val="65000"/>
+          </a:schemeClr>
+        </a:solidFill>
+        <a:round/>
+      </a:ln>
+    </cs:spPr>
+  </cs:dropLine>
+  <cs:errorBar>
+    <cs:lnRef idx="0"/>
+    <cs:fillRef idx="0"/>
+    <cs:effectRef idx="0"/>
+    <cs:fontRef idx="minor">
+      <a:schemeClr val="tx1"/>
+    </cs:fontRef>
+    <cs:spPr>
+      <a:ln w="9525" cap="flat" cmpd="sng" algn="ctr">
+        <a:solidFill>
+          <a:schemeClr val="tx1">
+            <a:lumMod val="65000"/>
+            <a:lumOff val="35000"/>
+          </a:schemeClr>
+        </a:solidFill>
+        <a:round/>
+      </a:ln>
+    </cs:spPr>
+  </cs:errorBar>
+  <cs:floor>
+    <cs:lnRef idx="0"/>
+    <cs:fillRef idx="0"/>
+    <cs:effectRef idx="0"/>
+    <cs:fontRef idx="minor">
+      <a:schemeClr val="tx1"/>
+    </cs:fontRef>
+    <cs:spPr>
+      <a:noFill/>
+      <a:ln>
+        <a:noFill/>
+      </a:ln>
+    </cs:spPr>
+  </cs:floor>
+  <cs:gridlineMajor>
+    <cs:lnRef idx="0"/>
+    <cs:fillRef idx="0"/>
+    <cs:effectRef idx="0"/>
+    <cs:fontRef idx="minor">
+      <a:schemeClr val="tx1"/>
+    </cs:fontRef>
+    <cs:spPr>
+      <a:ln w="9525" cap="flat" cmpd="sng" algn="ctr">
+        <a:solidFill>
+          <a:schemeClr val="tx1">
+            <a:lumMod val="15000"/>
+            <a:lumOff val="85000"/>
+          </a:schemeClr>
+        </a:solidFill>
+        <a:round/>
+      </a:ln>
+    </cs:spPr>
+  </cs:gridlineMajor>
+  <cs:gridlineMinor>
+    <cs:lnRef idx="0"/>
+    <cs:fillRef idx="0"/>
+    <cs:effectRef idx="0"/>
+    <cs:fontRef idx="minor">
+      <a:schemeClr val="tx1"/>
+    </cs:fontRef>
+    <cs:spPr>
+      <a:ln w="9525" cap="flat" cmpd="sng" algn="ctr">
+        <a:solidFill>
+          <a:schemeClr val="tx1">
+            <a:lumMod val="5000"/>
+            <a:lumOff val="95000"/>
+          </a:schemeClr>
+        </a:solidFill>
+        <a:round/>
+      </a:ln>
+    </cs:spPr>
+  </cs:gridlineMinor>
+  <cs:hiLoLine>
+    <cs:lnRef idx="0"/>
+    <cs:fillRef idx="0"/>
+    <cs:effectRef idx="0"/>
+    <cs:fontRef idx="minor">
+      <a:schemeClr val="tx1"/>
+    </cs:fontRef>
+    <cs:spPr>
+      <a:ln w="9525" cap="flat" cmpd="sng" algn="ctr">
+        <a:solidFill>
+          <a:schemeClr val="tx1">
+            <a:lumMod val="50000"/>
+            <a:lumOff val="50000"/>
+          </a:schemeClr>
+        </a:solidFill>
+        <a:round/>
+      </a:ln>
+    </cs:spPr>
+  </cs:hiLoLine>
+  <cs:leaderLine>
+    <cs:lnRef idx="0"/>
+    <cs:fillRef idx="0"/>
+    <cs:effectRef idx="0"/>
+    <cs:fontRef idx="minor">
+      <a:schemeClr val="tx1"/>
+    </cs:fontRef>
+    <cs:spPr>
+      <a:ln w="9525" cap="flat" cmpd="sng" algn="ctr">
+        <a:solidFill>
+          <a:schemeClr val="tx1">
+            <a:lumMod val="35000"/>
+            <a:lumOff val="65000"/>
+          </a:schemeClr>
+        </a:solidFill>
+        <a:round/>
+      </a:ln>
+    </cs:spPr>
+  </cs:leaderLine>
+  <cs:legend>
+    <cs:lnRef idx="0"/>
+    <cs:fillRef idx="0"/>
+    <cs:effectRef idx="0"/>
+    <cs:fontRef idx="minor">
+      <a:schemeClr val="tx1">
+        <a:lumMod val="65000"/>
+        <a:lumOff val="35000"/>
+      </a:schemeClr>
+    </cs:fontRef>
+    <cs:defRPr sz="1197" kern="1200"/>
+  </cs:legend>
+  <cs:plotArea mods="allowNoFillOverride allowNoLineOverride">
+    <cs:lnRef idx="0"/>
+    <cs:fillRef idx="0"/>
+    <cs:effectRef idx="0"/>
+    <cs:fontRef idx="minor">
+      <a:schemeClr val="tx1"/>
+    </cs:fontRef>
+  </cs:plotArea>
+  <cs:plotArea3D mods="allowNoFillOverride allowNoLineOverride">
+    <cs:lnRef idx="0"/>
+    <cs:fillRef idx="0"/>
+    <cs:effectRef idx="0"/>
+    <cs:fontRef idx="minor">
+      <a:schemeClr val="tx1"/>
+    </cs:fontRef>
+  </cs:plotArea3D>
+  <cs:seriesAxis>
+    <cs:lnRef idx="0"/>
+    <cs:fillRef idx="0"/>
+    <cs:effectRef idx="0"/>
+    <cs:fontRef idx="minor">
+      <a:schemeClr val="tx1">
+        <a:lumMod val="65000"/>
+        <a:lumOff val="35000"/>
+      </a:schemeClr>
+    </cs:fontRef>
+    <cs:defRPr sz="1197" kern="1200"/>
+  </cs:seriesAxis>
+  <cs:seriesLine>
+    <cs:lnRef idx="0"/>
+    <cs:fillRef idx="0"/>
+    <cs:effectRef idx="0"/>
+    <cs:fontRef idx="minor">
+      <a:schemeClr val="tx1"/>
+    </cs:fontRef>
+    <cs:spPr>
+      <a:ln w="9525" cap="flat" cmpd="sng" algn="ctr">
+        <a:solidFill>
+          <a:schemeClr val="tx1">
+            <a:lumMod val="35000"/>
+            <a:lumOff val="65000"/>
+          </a:schemeClr>
+        </a:solidFill>
+        <a:round/>
+      </a:ln>
+    </cs:spPr>
+  </cs:seriesLine>
+  <cs:title>
+    <cs:lnRef idx="0"/>
+    <cs:fillRef idx="0"/>
+    <cs:effectRef idx="0"/>
+    <cs:fontRef idx="minor">
+      <a:schemeClr val="tx1">
+        <a:lumMod val="65000"/>
+        <a:lumOff val="35000"/>
+      </a:schemeClr>
+    </cs:fontRef>
+    <cs:defRPr sz="1862" b="0" kern="1200" spc="0" baseline="0"/>
+  </cs:title>
+  <cs:trendline>
+    <cs:lnRef idx="0">
+      <cs:styleClr val="auto"/>
+    </cs:lnRef>
+    <cs:fillRef idx="0"/>
+    <cs:effectRef idx="0"/>
+    <cs:fontRef idx="minor">
+      <a:schemeClr val="tx1"/>
+    </cs:fontRef>
+    <cs:spPr>
+      <a:ln w="19050" cap="rnd">
+        <a:solidFill>
+          <a:schemeClr val="phClr"/>
+        </a:solidFill>
+        <a:prstDash val="sysDot"/>
+      </a:ln>
+    </cs:spPr>
+  </cs:trendline>
+  <cs:trendlineLabel>
+    <cs:lnRef idx="0"/>
+    <cs:fillRef idx="0"/>
+    <cs:effectRef idx="0"/>
+    <cs:fontRef idx="minor">
+      <a:schemeClr val="tx1">
+        <a:lumMod val="65000"/>
+        <a:lumOff val="35000"/>
+      </a:schemeClr>
+    </cs:fontRef>
+    <cs:defRPr sz="1197" kern="1200"/>
+  </cs:trendlineLabel>
+  <cs:upBar>
+    <cs:lnRef idx="0"/>
+    <cs:fillRef idx="0"/>
+    <cs:effectRef idx="0"/>
+    <cs:fontRef idx="minor">
+      <a:schemeClr val="tx1"/>
+    </cs:fontRef>
+    <cs:spPr>
+      <a:solidFill>
+        <a:schemeClr val="lt1"/>
+      </a:solidFill>
+      <a:ln w="9525" cap="flat" cmpd="sng" algn="ctr">
+        <a:solidFill>
+          <a:schemeClr val="tx1">
+            <a:lumMod val="65000"/>
+            <a:lumOff val="35000"/>
+          </a:schemeClr>
+        </a:solidFill>
+        <a:round/>
+      </a:ln>
+    </cs:spPr>
+  </cs:upBar>
+  <cs:valueAxis>
+    <cs:lnRef idx="0"/>
+    <cs:fillRef idx="0"/>
+    <cs:effectRef idx="0"/>
+    <cs:fontRef idx="minor">
+      <a:schemeClr val="tx1">
+        <a:lumMod val="65000"/>
+        <a:lumOff val="35000"/>
+      </a:schemeClr>
+    </cs:fontRef>
+    <cs:defRPr sz="1197" kern="1200"/>
+  </cs:valueAxis>
+  <cs:wall>
+    <cs:lnRef idx="0"/>
+    <cs:fillRef idx="0"/>
+    <cs:effectRef idx="0"/>
+    <cs:fontRef idx="minor">
+      <a:schemeClr val="tx1"/>
+    </cs:fontRef>
+    <cs:spPr>
+      <a:noFill/>
+      <a:ln>
+        <a:noFill/>
+      </a:ln>
+    </cs:spPr>
+  </cs:wall>
+</cs:chartStyle>
+</file>
+
+<file path=ppt/charts/style10.xml><?xml version="1.0" encoding="utf-8"?>
 <cs:chartStyle xmlns:cs="http://schemas.microsoft.com/office/drawing/2012/chartStyle" xmlns:a="http://schemas.openxmlformats.org/drawingml/2006/main" id="216">
   <cs:axisTitle>
     <cs:lnRef idx="0"/>
@@ -3314,7 +3730,7 @@
           <a:p>
             <a:fld id="{D097B472-4798-4842-B4B1-6BCCE31188E7}" type="datetimeFigureOut">
               <a:rPr lang="ko-KR" altLang="en-US" smtClean="0"/>
-              <a:t>2026-03-02</a:t>
+              <a:t>2026-03-05</a:t>
             </a:fld>
             <a:endParaRPr lang="ko-KR" altLang="en-US"/>
           </a:p>
@@ -3991,7 +4407,7 @@
           <a:p>
             <a:fld id="{3D77B4FC-4CAA-4F72-BC88-191AB9EE6375}" type="datetimeFigureOut">
               <a:rPr lang="ko-KR" altLang="en-US" smtClean="0"/>
-              <a:t>2026-03-02</a:t>
+              <a:t>2026-03-05</a:t>
             </a:fld>
             <a:endParaRPr lang="ko-KR" altLang="en-US"/>
           </a:p>
@@ -4161,7 +4577,7 @@
           <a:p>
             <a:fld id="{3D77B4FC-4CAA-4F72-BC88-191AB9EE6375}" type="datetimeFigureOut">
               <a:rPr lang="ko-KR" altLang="en-US" smtClean="0"/>
-              <a:t>2026-03-02</a:t>
+              <a:t>2026-03-05</a:t>
             </a:fld>
             <a:endParaRPr lang="ko-KR" altLang="en-US"/>
           </a:p>
@@ -4341,7 +4757,7 @@
           <a:p>
             <a:fld id="{3D77B4FC-4CAA-4F72-BC88-191AB9EE6375}" type="datetimeFigureOut">
               <a:rPr lang="ko-KR" altLang="en-US" smtClean="0"/>
-              <a:t>2026-03-02</a:t>
+              <a:t>2026-03-05</a:t>
             </a:fld>
             <a:endParaRPr lang="ko-KR" altLang="en-US"/>
           </a:p>
@@ -4511,7 +4927,7 @@
           <a:p>
             <a:fld id="{3D77B4FC-4CAA-4F72-BC88-191AB9EE6375}" type="datetimeFigureOut">
               <a:rPr lang="ko-KR" altLang="en-US" smtClean="0"/>
-              <a:t>2026-03-02</a:t>
+              <a:t>2026-03-05</a:t>
             </a:fld>
             <a:endParaRPr lang="ko-KR" altLang="en-US"/>
           </a:p>
@@ -4757,7 +5173,7 @@
           <a:p>
             <a:fld id="{3D77B4FC-4CAA-4F72-BC88-191AB9EE6375}" type="datetimeFigureOut">
               <a:rPr lang="ko-KR" altLang="en-US" smtClean="0"/>
-              <a:t>2026-03-02</a:t>
+              <a:t>2026-03-05</a:t>
             </a:fld>
             <a:endParaRPr lang="ko-KR" altLang="en-US"/>
           </a:p>
@@ -4989,7 +5405,7 @@
           <a:p>
             <a:fld id="{3D77B4FC-4CAA-4F72-BC88-191AB9EE6375}" type="datetimeFigureOut">
               <a:rPr lang="ko-KR" altLang="en-US" smtClean="0"/>
-              <a:t>2026-03-02</a:t>
+              <a:t>2026-03-05</a:t>
             </a:fld>
             <a:endParaRPr lang="ko-KR" altLang="en-US"/>
           </a:p>
@@ -5356,7 +5772,7 @@
           <a:p>
             <a:fld id="{3D77B4FC-4CAA-4F72-BC88-191AB9EE6375}" type="datetimeFigureOut">
               <a:rPr lang="ko-KR" altLang="en-US" smtClean="0"/>
-              <a:t>2026-03-02</a:t>
+              <a:t>2026-03-05</a:t>
             </a:fld>
             <a:endParaRPr lang="ko-KR" altLang="en-US"/>
           </a:p>
@@ -5474,7 +5890,7 @@
           <a:p>
             <a:fld id="{3D77B4FC-4CAA-4F72-BC88-191AB9EE6375}" type="datetimeFigureOut">
               <a:rPr lang="ko-KR" altLang="en-US" smtClean="0"/>
-              <a:t>2026-03-02</a:t>
+              <a:t>2026-03-05</a:t>
             </a:fld>
             <a:endParaRPr lang="ko-KR" altLang="en-US"/>
           </a:p>
@@ -5569,7 +5985,7 @@
           <a:p>
             <a:fld id="{3D77B4FC-4CAA-4F72-BC88-191AB9EE6375}" type="datetimeFigureOut">
               <a:rPr lang="ko-KR" altLang="en-US" smtClean="0"/>
-              <a:t>2026-03-02</a:t>
+              <a:t>2026-03-05</a:t>
             </a:fld>
             <a:endParaRPr lang="ko-KR" altLang="en-US"/>
           </a:p>
@@ -5846,7 +6262,7 @@
           <a:p>
             <a:fld id="{3D77B4FC-4CAA-4F72-BC88-191AB9EE6375}" type="datetimeFigureOut">
               <a:rPr lang="ko-KR" altLang="en-US" smtClean="0"/>
-              <a:t>2026-03-02</a:t>
+              <a:t>2026-03-05</a:t>
             </a:fld>
             <a:endParaRPr lang="ko-KR" altLang="en-US"/>
           </a:p>
@@ -6103,7 +6519,7 @@
           <a:p>
             <a:fld id="{3D77B4FC-4CAA-4F72-BC88-191AB9EE6375}" type="datetimeFigureOut">
               <a:rPr lang="ko-KR" altLang="en-US" smtClean="0"/>
-              <a:t>2026-03-02</a:t>
+              <a:t>2026-03-05</a:t>
             </a:fld>
             <a:endParaRPr lang="ko-KR" altLang="en-US"/>
           </a:p>
@@ -6316,7 +6732,7 @@
           <a:p>
             <a:fld id="{3D77B4FC-4CAA-4F72-BC88-191AB9EE6375}" type="datetimeFigureOut">
               <a:rPr lang="ko-KR" altLang="en-US" smtClean="0"/>
-              <a:t>2026-03-02</a:t>
+              <a:t>2026-03-05</a:t>
             </a:fld>
             <a:endParaRPr lang="ko-KR" altLang="en-US"/>
           </a:p>
@@ -18918,8 +19334,8 @@
               </a:p>
             </p:txBody>
           </p:sp>
-          <mc:AlternateContent xmlns:mc="http://schemas.openxmlformats.org/markup-compatibility/2006">
-            <mc:Choice xmlns:a14="http://schemas.microsoft.com/office/drawing/2010/main" Requires="a14">
+          <mc:AlternateContent xmlns:mc="http://schemas.openxmlformats.org/markup-compatibility/2006" xmlns:a14="http://schemas.microsoft.com/office/drawing/2010/main">
+            <mc:Choice Requires="a14">
               <p:graphicFrame>
                 <p:nvGraphicFramePr>
                   <p:cNvPr id="19" name="차트 18">
@@ -18949,7 +19365,7 @@
                 </a:graphic>
               </p:graphicFrame>
             </mc:Choice>
-            <mc:Fallback>
+            <mc:Fallback xmlns="">
               <p:graphicFrame>
                 <p:nvGraphicFramePr>
                   <p:cNvPr id="19" name="차트 18">
@@ -18974,7 +19390,7 @@
                 </p:xfrm>
                 <a:graphic>
                   <a:graphicData uri="http://schemas.openxmlformats.org/drawingml/2006/chart">
-                    <c:chart xmlns:c="http://schemas.openxmlformats.org/drawingml/2006/chart" xmlns:r="http://schemas.openxmlformats.org/officeDocument/2006/relationships" r:id="rId3"/>
+                    <c:chart xmlns:c="http://schemas.openxmlformats.org/drawingml/2006/chart" xmlns:r="http://schemas.openxmlformats.org/officeDocument/2006/relationships" r:id="rId4"/>
                   </a:graphicData>
                 </a:graphic>
               </p:graphicFrame>
@@ -19457,7 +19873,7 @@
                   <a:avLst/>
                 </a:prstGeom>
                 <a:blipFill>
-                  <a:blip r:embed="rId4"/>
+                  <a:blip r:embed="rId5"/>
                   <a:stretch>
                     <a:fillRect l="-6250" r="-1042" b="-15556"/>
                   </a:stretch>
@@ -19483,6 +19899,507 @@
     <p:extLst>
       <p:ext uri="{BB962C8B-B14F-4D97-AF65-F5344CB8AC3E}">
         <p14:creationId xmlns:p14="http://schemas.microsoft.com/office/powerpoint/2010/main" val="1501519675"/>
+      </p:ext>
+    </p:extLst>
+  </p:cSld>
+  <p:clrMapOvr>
+    <a:masterClrMapping/>
+  </p:clrMapOvr>
+</p:sld>
+</file>
+
+<file path=ppt/slides/slide9.xml><?xml version="1.0" encoding="utf-8"?>
+<p:sld xmlns:a="http://schemas.openxmlformats.org/drawingml/2006/main" xmlns:r="http://schemas.openxmlformats.org/officeDocument/2006/relationships" xmlns:p="http://schemas.openxmlformats.org/presentationml/2006/main">
+  <p:cSld>
+    <p:spTree>
+      <p:nvGrpSpPr>
+        <p:cNvPr id="1" name=""/>
+        <p:cNvGrpSpPr/>
+        <p:nvPr/>
+      </p:nvGrpSpPr>
+      <p:grpSpPr>
+        <a:xfrm>
+          <a:off x="0" y="0"/>
+          <a:ext cx="0" cy="0"/>
+          <a:chOff x="0" y="0"/>
+          <a:chExt cx="0" cy="0"/>
+        </a:xfrm>
+      </p:grpSpPr>
+      <p:grpSp>
+        <p:nvGrpSpPr>
+          <p:cNvPr id="3" name="그룹 2">
+            <a:extLst>
+              <a:ext uri="{FF2B5EF4-FFF2-40B4-BE49-F238E27FC236}">
+                <a16:creationId xmlns:a16="http://schemas.microsoft.com/office/drawing/2014/main" id="{0F4BAF75-33C8-4D95-4BD3-5599E84D4837}"/>
+              </a:ext>
+            </a:extLst>
+          </p:cNvPr>
+          <p:cNvGrpSpPr/>
+          <p:nvPr/>
+        </p:nvGrpSpPr>
+        <p:grpSpPr>
+          <a:xfrm>
+            <a:off x="10774907" y="2953614"/>
+            <a:ext cx="3649260" cy="3649857"/>
+            <a:chOff x="10774907" y="2953614"/>
+            <a:chExt cx="3649260" cy="3649857"/>
+          </a:xfrm>
+        </p:grpSpPr>
+        <p:pic>
+          <p:nvPicPr>
+            <p:cNvPr id="22" name="그림 21" descr="다채로움, 노랑, 스크린샷, 그래픽이(가) 표시된 사진&#10;&#10;AI 생성 콘텐츠는 정확하지 않을 수 있습니다.">
+              <a:extLst>
+                <a:ext uri="{FF2B5EF4-FFF2-40B4-BE49-F238E27FC236}">
+                  <a16:creationId xmlns:a16="http://schemas.microsoft.com/office/drawing/2014/main" id="{95141248-DA4B-E628-813B-7B06A5F4087A}"/>
+                </a:ext>
+              </a:extLst>
+            </p:cNvPr>
+            <p:cNvPicPr>
+              <a:picLocks noChangeAspect="1"/>
+            </p:cNvPicPr>
+            <p:nvPr/>
+          </p:nvPicPr>
+          <p:blipFill>
+            <a:blip r:embed="rId2">
+              <a:extLst>
+                <a:ext uri="{28A0092B-C50C-407E-A947-70E740481C1C}">
+                  <a14:useLocalDpi xmlns:a14="http://schemas.microsoft.com/office/drawing/2010/main" val="0"/>
+                </a:ext>
+              </a:extLst>
+            </a:blip>
+            <a:stretch>
+              <a:fillRect/>
+            </a:stretch>
+          </p:blipFill>
+          <p:spPr>
+            <a:xfrm>
+              <a:off x="10775807" y="2953614"/>
+              <a:ext cx="1824180" cy="1824180"/>
+            </a:xfrm>
+            <a:prstGeom prst="rect">
+              <a:avLst/>
+            </a:prstGeom>
+          </p:spPr>
+        </p:pic>
+        <p:sp>
+          <p:nvSpPr>
+            <p:cNvPr id="23" name="직사각형 22">
+              <a:extLst>
+                <a:ext uri="{FF2B5EF4-FFF2-40B4-BE49-F238E27FC236}">
+                  <a16:creationId xmlns:a16="http://schemas.microsoft.com/office/drawing/2014/main" id="{523509C2-15E8-00DE-2EA9-90168293EAAE}"/>
+                </a:ext>
+              </a:extLst>
+            </p:cNvPr>
+            <p:cNvSpPr/>
+            <p:nvPr/>
+          </p:nvSpPr>
+          <p:spPr>
+            <a:xfrm>
+              <a:off x="11327341" y="3545755"/>
+              <a:ext cx="433381" cy="639898"/>
+            </a:xfrm>
+            <a:prstGeom prst="rect">
+              <a:avLst/>
+            </a:prstGeom>
+            <a:noFill/>
+            <a:ln w="19050">
+              <a:solidFill>
+                <a:srgbClr val="FF0000"/>
+              </a:solidFill>
+            </a:ln>
+          </p:spPr>
+          <p:style>
+            <a:lnRef idx="2">
+              <a:schemeClr val="accent1">
+                <a:shade val="15000"/>
+              </a:schemeClr>
+            </a:lnRef>
+            <a:fillRef idx="1">
+              <a:schemeClr val="accent1"/>
+            </a:fillRef>
+            <a:effectRef idx="0">
+              <a:schemeClr val="accent1"/>
+            </a:effectRef>
+            <a:fontRef idx="minor">
+              <a:schemeClr val="lt1"/>
+            </a:fontRef>
+          </p:style>
+          <p:txBody>
+            <a:bodyPr rtlCol="0" anchor="ctr"/>
+            <a:lstStyle/>
+            <a:p>
+              <a:pPr algn="ctr"/>
+              <a:endParaRPr lang="ko-KR" altLang="en-US"/>
+            </a:p>
+          </p:txBody>
+        </p:sp>
+        <p:pic>
+          <p:nvPicPr>
+            <p:cNvPr id="25" name="그림 24" descr="스크린샷, 다채로움, 키보드, 빛이(가) 표시된 사진&#10;&#10;AI 생성 콘텐츠는 정확하지 않을 수 있습니다.">
+              <a:extLst>
+                <a:ext uri="{FF2B5EF4-FFF2-40B4-BE49-F238E27FC236}">
+                  <a16:creationId xmlns:a16="http://schemas.microsoft.com/office/drawing/2014/main" id="{4C345752-C49E-C2AB-187A-4713E970E1E0}"/>
+                </a:ext>
+              </a:extLst>
+            </p:cNvPr>
+            <p:cNvPicPr>
+              <a:picLocks noChangeAspect="1"/>
+            </p:cNvPicPr>
+            <p:nvPr/>
+          </p:nvPicPr>
+          <p:blipFill>
+            <a:blip r:embed="rId3">
+              <a:extLst>
+                <a:ext uri="{28A0092B-C50C-407E-A947-70E740481C1C}">
+                  <a14:useLocalDpi xmlns:a14="http://schemas.microsoft.com/office/drawing/2010/main" val="0"/>
+                </a:ext>
+              </a:extLst>
+            </a:blip>
+            <a:stretch>
+              <a:fillRect/>
+            </a:stretch>
+          </p:blipFill>
+          <p:spPr>
+            <a:xfrm>
+              <a:off x="12599987" y="2955519"/>
+              <a:ext cx="1824180" cy="1824180"/>
+            </a:xfrm>
+            <a:prstGeom prst="rect">
+              <a:avLst/>
+            </a:prstGeom>
+          </p:spPr>
+        </p:pic>
+        <p:sp>
+          <p:nvSpPr>
+            <p:cNvPr id="26" name="직사각형 25">
+              <a:extLst>
+                <a:ext uri="{FF2B5EF4-FFF2-40B4-BE49-F238E27FC236}">
+                  <a16:creationId xmlns:a16="http://schemas.microsoft.com/office/drawing/2014/main" id="{A7DEF4F2-E780-B139-CECD-7A1FEE6D51A4}"/>
+                </a:ext>
+              </a:extLst>
+            </p:cNvPr>
+            <p:cNvSpPr/>
+            <p:nvPr/>
+          </p:nvSpPr>
+          <p:spPr>
+            <a:xfrm>
+              <a:off x="13176841" y="3547660"/>
+              <a:ext cx="433381" cy="639898"/>
+            </a:xfrm>
+            <a:prstGeom prst="rect">
+              <a:avLst/>
+            </a:prstGeom>
+            <a:noFill/>
+            <a:ln w="19050">
+              <a:solidFill>
+                <a:srgbClr val="FF0000"/>
+              </a:solidFill>
+            </a:ln>
+          </p:spPr>
+          <p:style>
+            <a:lnRef idx="2">
+              <a:schemeClr val="accent1">
+                <a:shade val="15000"/>
+              </a:schemeClr>
+            </a:lnRef>
+            <a:fillRef idx="1">
+              <a:schemeClr val="accent1"/>
+            </a:fillRef>
+            <a:effectRef idx="0">
+              <a:schemeClr val="accent1"/>
+            </a:effectRef>
+            <a:fontRef idx="minor">
+              <a:schemeClr val="lt1"/>
+            </a:fontRef>
+          </p:style>
+          <p:txBody>
+            <a:bodyPr rtlCol="0" anchor="ctr"/>
+            <a:lstStyle/>
+            <a:p>
+              <a:pPr algn="ctr"/>
+              <a:endParaRPr lang="ko-KR" altLang="en-US"/>
+            </a:p>
+          </p:txBody>
+        </p:sp>
+        <p:pic>
+          <p:nvPicPr>
+            <p:cNvPr id="28" name="그림 27" descr="다채로움, 스크린샷, 노랑, 프랙탈 아트이(가) 표시된 사진&#10;&#10;AI 생성 콘텐츠는 정확하지 않을 수 있습니다.">
+              <a:extLst>
+                <a:ext uri="{FF2B5EF4-FFF2-40B4-BE49-F238E27FC236}">
+                  <a16:creationId xmlns:a16="http://schemas.microsoft.com/office/drawing/2014/main" id="{D67DF31E-7A89-971C-26C2-6B2786FBE3B9}"/>
+                </a:ext>
+              </a:extLst>
+            </p:cNvPr>
+            <p:cNvPicPr>
+              <a:picLocks noChangeAspect="1"/>
+            </p:cNvPicPr>
+            <p:nvPr/>
+          </p:nvPicPr>
+          <p:blipFill>
+            <a:blip r:embed="rId4">
+              <a:extLst>
+                <a:ext uri="{28A0092B-C50C-407E-A947-70E740481C1C}">
+                  <a14:useLocalDpi xmlns:a14="http://schemas.microsoft.com/office/drawing/2010/main" val="0"/>
+                </a:ext>
+              </a:extLst>
+            </a:blip>
+            <a:stretch>
+              <a:fillRect/>
+            </a:stretch>
+          </p:blipFill>
+          <p:spPr>
+            <a:xfrm>
+              <a:off x="10774907" y="4778271"/>
+              <a:ext cx="1825200" cy="1825200"/>
+            </a:xfrm>
+            <a:prstGeom prst="rect">
+              <a:avLst/>
+            </a:prstGeom>
+          </p:spPr>
+        </p:pic>
+        <p:pic>
+          <p:nvPicPr>
+            <p:cNvPr id="29" name="그림 28" descr="다채로움, 스크린샷, 무지개, 일렉트릭 블루이(가) 표시된 사진&#10;&#10;AI 생성 콘텐츠는 정확하지 않을 수 있습니다.">
+              <a:extLst>
+                <a:ext uri="{FF2B5EF4-FFF2-40B4-BE49-F238E27FC236}">
+                  <a16:creationId xmlns:a16="http://schemas.microsoft.com/office/drawing/2014/main" id="{62DF187A-7458-CBA2-1148-7278F118E7C0}"/>
+                </a:ext>
+              </a:extLst>
+            </p:cNvPr>
+            <p:cNvPicPr>
+              <a:picLocks noChangeAspect="1"/>
+            </p:cNvPicPr>
+            <p:nvPr/>
+          </p:nvPicPr>
+          <p:blipFill>
+            <a:blip r:embed="rId5">
+              <a:extLst>
+                <a:ext uri="{28A0092B-C50C-407E-A947-70E740481C1C}">
+                  <a14:useLocalDpi xmlns:a14="http://schemas.microsoft.com/office/drawing/2010/main" val="0"/>
+                </a:ext>
+              </a:extLst>
+            </a:blip>
+            <a:stretch>
+              <a:fillRect/>
+            </a:stretch>
+          </p:blipFill>
+          <p:spPr>
+            <a:xfrm>
+              <a:off x="12597942" y="4777421"/>
+              <a:ext cx="1825200" cy="1825200"/>
+            </a:xfrm>
+            <a:prstGeom prst="rect">
+              <a:avLst/>
+            </a:prstGeom>
+          </p:spPr>
+        </p:pic>
+        <p:sp>
+          <p:nvSpPr>
+            <p:cNvPr id="31" name="직사각형 30">
+              <a:extLst>
+                <a:ext uri="{FF2B5EF4-FFF2-40B4-BE49-F238E27FC236}">
+                  <a16:creationId xmlns:a16="http://schemas.microsoft.com/office/drawing/2014/main" id="{ABB65009-831A-34E6-7C3F-1BB058E37D8F}"/>
+                </a:ext>
+              </a:extLst>
+            </p:cNvPr>
+            <p:cNvSpPr/>
+            <p:nvPr/>
+          </p:nvSpPr>
+          <p:spPr>
+            <a:xfrm>
+              <a:off x="11631807" y="5509806"/>
+              <a:ext cx="250950" cy="453390"/>
+            </a:xfrm>
+            <a:prstGeom prst="rect">
+              <a:avLst/>
+            </a:prstGeom>
+            <a:noFill/>
+            <a:ln w="19050">
+              <a:solidFill>
+                <a:srgbClr val="FF0000"/>
+              </a:solidFill>
+            </a:ln>
+          </p:spPr>
+          <p:style>
+            <a:lnRef idx="2">
+              <a:schemeClr val="accent1">
+                <a:shade val="15000"/>
+              </a:schemeClr>
+            </a:lnRef>
+            <a:fillRef idx="1">
+              <a:schemeClr val="accent1"/>
+            </a:fillRef>
+            <a:effectRef idx="0">
+              <a:schemeClr val="accent1"/>
+            </a:effectRef>
+            <a:fontRef idx="minor">
+              <a:schemeClr val="lt1"/>
+            </a:fontRef>
+          </p:style>
+          <p:txBody>
+            <a:bodyPr rtlCol="0" anchor="ctr"/>
+            <a:lstStyle/>
+            <a:p>
+              <a:pPr algn="ctr"/>
+              <a:endParaRPr lang="ko-KR" altLang="en-US"/>
+            </a:p>
+          </p:txBody>
+        </p:sp>
+        <p:sp>
+          <p:nvSpPr>
+            <p:cNvPr id="32" name="직사각형 31">
+              <a:extLst>
+                <a:ext uri="{FF2B5EF4-FFF2-40B4-BE49-F238E27FC236}">
+                  <a16:creationId xmlns:a16="http://schemas.microsoft.com/office/drawing/2014/main" id="{CE8C5E8A-DD4A-E30A-4B10-2B71A422E86A}"/>
+                </a:ext>
+              </a:extLst>
+            </p:cNvPr>
+            <p:cNvSpPr/>
+            <p:nvPr/>
+          </p:nvSpPr>
+          <p:spPr>
+            <a:xfrm>
+              <a:off x="13457382" y="5492280"/>
+              <a:ext cx="250950" cy="453390"/>
+            </a:xfrm>
+            <a:prstGeom prst="rect">
+              <a:avLst/>
+            </a:prstGeom>
+            <a:noFill/>
+            <a:ln w="19050">
+              <a:solidFill>
+                <a:srgbClr val="FF0000"/>
+              </a:solidFill>
+            </a:ln>
+          </p:spPr>
+          <p:style>
+            <a:lnRef idx="2">
+              <a:schemeClr val="accent1">
+                <a:shade val="15000"/>
+              </a:schemeClr>
+            </a:lnRef>
+            <a:fillRef idx="1">
+              <a:schemeClr val="accent1"/>
+            </a:fillRef>
+            <a:effectRef idx="0">
+              <a:schemeClr val="accent1"/>
+            </a:effectRef>
+            <a:fontRef idx="minor">
+              <a:schemeClr val="lt1"/>
+            </a:fontRef>
+          </p:style>
+          <p:txBody>
+            <a:bodyPr rtlCol="0" anchor="ctr"/>
+            <a:lstStyle/>
+            <a:p>
+              <a:pPr algn="ctr"/>
+              <a:endParaRPr lang="ko-KR" altLang="en-US"/>
+            </a:p>
+          </p:txBody>
+        </p:sp>
+        <p:sp>
+          <p:nvSpPr>
+            <p:cNvPr id="39" name="TextBox 38">
+              <a:extLst>
+                <a:ext uri="{FF2B5EF4-FFF2-40B4-BE49-F238E27FC236}">
+                  <a16:creationId xmlns:a16="http://schemas.microsoft.com/office/drawing/2014/main" id="{C3D73AFD-A62D-A877-D620-3AA81B4B254C}"/>
+                </a:ext>
+              </a:extLst>
+            </p:cNvPr>
+            <p:cNvSpPr txBox="1"/>
+            <p:nvPr/>
+          </p:nvSpPr>
+          <p:spPr>
+            <a:xfrm>
+              <a:off x="11272500" y="6138669"/>
+              <a:ext cx="1325932" cy="369332"/>
+            </a:xfrm>
+            <a:prstGeom prst="rect">
+              <a:avLst/>
+            </a:prstGeom>
+            <a:noFill/>
+          </p:spPr>
+          <p:txBody>
+            <a:bodyPr wrap="square" rtlCol="0">
+              <a:spAutoFit/>
+            </a:bodyPr>
+            <a:lstStyle/>
+            <a:p>
+              <a:pPr algn="r"/>
+              <a:r>
+                <a:rPr lang="en-US" altLang="ko-KR" b="1">
+                  <a:solidFill>
+                    <a:schemeClr val="bg1"/>
+                  </a:solidFill>
+                  <a:latin typeface="Times New Roman" panose="02020603050405020304" pitchFamily="18" charset="0"/>
+                  <a:cs typeface="Times New Roman" panose="02020603050405020304" pitchFamily="18" charset="0"/>
+                </a:rPr>
+                <a:t>Previous</a:t>
+              </a:r>
+              <a:endParaRPr lang="ko-KR" altLang="en-US" b="1">
+                <a:solidFill>
+                  <a:schemeClr val="bg1"/>
+                </a:solidFill>
+                <a:latin typeface="Times New Roman" panose="02020603050405020304" pitchFamily="18" charset="0"/>
+                <a:cs typeface="Times New Roman" panose="02020603050405020304" pitchFamily="18" charset="0"/>
+              </a:endParaRPr>
+            </a:p>
+          </p:txBody>
+        </p:sp>
+        <p:sp>
+          <p:nvSpPr>
+            <p:cNvPr id="40" name="TextBox 39">
+              <a:extLst>
+                <a:ext uri="{FF2B5EF4-FFF2-40B4-BE49-F238E27FC236}">
+                  <a16:creationId xmlns:a16="http://schemas.microsoft.com/office/drawing/2014/main" id="{238C2890-75BC-F125-C2C4-685A6BED4916}"/>
+                </a:ext>
+              </a:extLst>
+            </p:cNvPr>
+            <p:cNvSpPr txBox="1"/>
+            <p:nvPr/>
+          </p:nvSpPr>
+          <p:spPr>
+            <a:xfrm>
+              <a:off x="12994646" y="6138669"/>
+              <a:ext cx="1325932" cy="369332"/>
+            </a:xfrm>
+            <a:prstGeom prst="rect">
+              <a:avLst/>
+            </a:prstGeom>
+            <a:noFill/>
+          </p:spPr>
+          <p:txBody>
+            <a:bodyPr wrap="square" rtlCol="0">
+              <a:spAutoFit/>
+            </a:bodyPr>
+            <a:lstStyle/>
+            <a:p>
+              <a:pPr algn="r"/>
+              <a:r>
+                <a:rPr lang="en-US" altLang="ko-KR" b="1">
+                  <a:solidFill>
+                    <a:schemeClr val="bg1"/>
+                  </a:solidFill>
+                  <a:latin typeface="Times New Roman" panose="02020603050405020304" pitchFamily="18" charset="0"/>
+                  <a:cs typeface="Times New Roman" panose="02020603050405020304" pitchFamily="18" charset="0"/>
+                </a:rPr>
+                <a:t>Ours</a:t>
+              </a:r>
+              <a:endParaRPr lang="ko-KR" altLang="en-US" b="1">
+                <a:solidFill>
+                  <a:schemeClr val="bg1"/>
+                </a:solidFill>
+                <a:latin typeface="Times New Roman" panose="02020603050405020304" pitchFamily="18" charset="0"/>
+                <a:cs typeface="Times New Roman" panose="02020603050405020304" pitchFamily="18" charset="0"/>
+              </a:endParaRPr>
+            </a:p>
+          </p:txBody>
+        </p:sp>
+      </p:grpSp>
+    </p:spTree>
+    <p:extLst>
+      <p:ext uri="{BB962C8B-B14F-4D97-AF65-F5344CB8AC3E}">
+        <p14:creationId xmlns:p14="http://schemas.microsoft.com/office/powerpoint/2010/main" val="2442288798"/>
       </p:ext>
     </p:extLst>
   </p:cSld>
